--- a/deck/BrandLoop-deck.pptx
+++ b/deck/BrandLoop-deck.pptx
@@ -4092,8 +4092,8 @@
         </p:nvSpPr>
         <p:spPr>
           <a:xfrm>
-            <a:off x="685800" y="1371600"/>
-            <a:ext cx="10820095" cy="2011680"/>
+            <a:off x="685800" y="2377440"/>
+            <a:ext cx="10820095" cy="2377440"/>
           </a:xfrm>
           <a:prstGeom prst="rect">
             <a:avLst/>
@@ -4112,7 +4112,7 @@
               </a:lnSpc>
             </a:pPr>
             <a:r>
-              <a:rPr sz="4000" b="1">
+              <a:rPr sz="4800" b="1">
                 <a:solidFill>
                   <a:srgbClr val="F3EFE5"/>
                 </a:solidFill>
@@ -4128,91 +4128,13 @@
               </a:lnSpc>
             </a:pPr>
             <a:r>
-              <a:rPr sz="4000" b="1">
+              <a:rPr sz="4800" b="1">
                 <a:solidFill>
                   <a:srgbClr val="FFD400"/>
                 </a:solidFill>
                 <a:latin typeface="Arial"/>
               </a:rPr>
               <a:t>E todo anúncio a parecer igual.</a:t>
-            </a:r>
-          </a:p>
-        </p:txBody>
-      </p:sp>
-      <p:sp>
-        <p:nvSpPr>
-          <p:cNvPr id="5" name="TextBox 4"/>
-          <p:cNvSpPr txBox="1"/>
-          <p:nvPr/>
-        </p:nvSpPr>
-        <p:spPr>
-          <a:xfrm>
-            <a:off x="685800" y="3657600"/>
-            <a:ext cx="7863840" cy="914400"/>
-          </a:xfrm>
-          <a:prstGeom prst="rect">
-            <a:avLst/>
-          </a:prstGeom>
-          <a:noFill/>
-        </p:spPr>
-        <p:txBody>
-          <a:bodyPr wrap="square" anchor="t" lIns="0" rIns="0" tIns="0" bIns="0">
-            <a:spAutoFit/>
-          </a:bodyPr>
-          <a:lstStyle/>
-          <a:p>
-            <a:pPr algn="l">
-              <a:lnSpc>
-                <a:spcPct val="105000"/>
-              </a:lnSpc>
-            </a:pPr>
-            <a:r>
-              <a:rPr sz="2600" b="1">
-                <a:solidFill>
-                  <a:srgbClr val="F3EFE5"/>
-                </a:solidFill>
-                <a:latin typeface="Arial"/>
-              </a:rPr>
-              <a:t>Produzir não é mais a vantagem. Ser reconhecível é.</a:t>
-            </a:r>
-          </a:p>
-        </p:txBody>
-      </p:sp>
-      <p:sp>
-        <p:nvSpPr>
-          <p:cNvPr id="6" name="TextBox 5"/>
-          <p:cNvSpPr txBox="1"/>
-          <p:nvPr/>
-        </p:nvSpPr>
-        <p:spPr>
-          <a:xfrm>
-            <a:off x="685800" y="4800600"/>
-            <a:ext cx="7863840" cy="1097280"/>
-          </a:xfrm>
-          <a:prstGeom prst="rect">
-            <a:avLst/>
-          </a:prstGeom>
-          <a:noFill/>
-        </p:spPr>
-        <p:txBody>
-          <a:bodyPr wrap="square" anchor="t" lIns="0" rIns="0" tIns="0" bIns="0">
-            <a:spAutoFit/>
-          </a:bodyPr>
-          <a:lstStyle/>
-          <a:p>
-            <a:pPr algn="l">
-              <a:lnSpc>
-                <a:spcPct val="135000"/>
-              </a:lnSpc>
-            </a:pPr>
-            <a:r>
-              <a:rPr sz="1300" b="0">
-                <a:solidFill>
-                  <a:srgbClr val="A8A49B"/>
-                </a:solidFill>
-                <a:latin typeface="Arial"/>
-              </a:rPr>
-              <a:t>Quando a mesma lógica e o mesmo prompt alimentam todo mundo, as marcas viram variação do mesmo template. Produzir ficou barato. Uma marca genérica continua cara.</a:t>
             </a:r>
           </a:p>
         </p:txBody>
@@ -5525,16 +5447,7 @@
               </a:lnSpc>
             </a:pPr>
             <a:r>
-              <a:rPr sz="1200" b="0">
-                <a:solidFill>
-                  <a:srgbClr val="A8A49B"/>
-                </a:solidFill>
-                <a:latin typeface="Arial"/>
-              </a:rPr>
-              <a:t>Nenhum agente conhece o outro — cada um recebe e devolve um contrato tipado. </a:t>
-            </a:r>
-            <a:r>
-              <a:rPr sz="1200" b="0">
+              <a:rPr sz="1300" b="0">
                 <a:solidFill>
                   <a:srgbClr val="FFD400"/>
                 </a:solidFill>

--- a/deck/BrandLoop-deck.pptx
+++ b/deck/BrandLoop-deck.pptx
@@ -4134,7 +4134,7 @@
                 </a:solidFill>
                 <a:latin typeface="Arial"/>
               </a:rPr>
-              <a:t>E todo anúncio a parecer igual.</a:t>
+              <a:t>E agora todo anúncio parece igual.</a:t>
             </a:r>
           </a:p>
         </p:txBody>

--- a/deck/BrandLoop-deck.pptx
+++ b/deck/BrandLoop-deck.pptx
@@ -6270,7 +6270,7 @@
         <p:spPr>
           <a:xfrm>
             <a:off x="685800" y="3611880"/>
-            <a:ext cx="3520440" cy="1371600"/>
+            <a:ext cx="2567863" cy="1371600"/>
           </a:xfrm>
           <a:prstGeom prst="rect">
             <a:avLst/>
@@ -6313,8 +6313,8 @@
         </p:nvSpPr>
         <p:spPr>
           <a:xfrm>
-            <a:off x="914400" y="3840480"/>
-            <a:ext cx="3063240" cy="640080"/>
+            <a:off x="886968" y="3840480"/>
+            <a:ext cx="2165527" cy="640080"/>
           </a:xfrm>
           <a:prstGeom prst="rect">
             <a:avLst/>
@@ -6329,7 +6329,7 @@
           <a:p>
             <a:pPr algn="l"/>
             <a:r>
-              <a:rPr sz="3400" b="1">
+              <a:rPr sz="2800" b="1">
                 <a:solidFill>
                   <a:srgbClr val="F3EFE5"/>
                 </a:solidFill>
@@ -6348,8 +6348,8 @@
         </p:nvSpPr>
         <p:spPr>
           <a:xfrm>
-            <a:off x="914400" y="4526280"/>
-            <a:ext cx="3063240" cy="274320"/>
+            <a:off x="886968" y="4526280"/>
+            <a:ext cx="2165527" cy="320040"/>
           </a:xfrm>
           <a:prstGeom prst="rect">
             <a:avLst/>
@@ -6364,7 +6364,7 @@
           <a:p>
             <a:pPr algn="l"/>
             <a:r>
-              <a:rPr sz="900" b="0" spc="120">
+              <a:rPr sz="850" b="0" spc="120">
                 <a:solidFill>
                   <a:srgbClr val="8A8A86"/>
                 </a:solidFill>
@@ -6383,8 +6383,8 @@
         </p:nvSpPr>
         <p:spPr>
           <a:xfrm>
-            <a:off x="4407408" y="3611880"/>
-            <a:ext cx="3520440" cy="1371600"/>
+            <a:off x="3436543" y="3611880"/>
+            <a:ext cx="2567863" cy="1371600"/>
           </a:xfrm>
           <a:prstGeom prst="rect">
             <a:avLst/>
@@ -6427,8 +6427,8 @@
         </p:nvSpPr>
         <p:spPr>
           <a:xfrm>
-            <a:off x="4636008" y="3840480"/>
-            <a:ext cx="3063240" cy="640080"/>
+            <a:off x="3637711" y="3840480"/>
+            <a:ext cx="2165527" cy="640080"/>
           </a:xfrm>
           <a:prstGeom prst="rect">
             <a:avLst/>
@@ -6443,7 +6443,7 @@
           <a:p>
             <a:pPr algn="l"/>
             <a:r>
-              <a:rPr sz="3400" b="1">
+              <a:rPr sz="2800" b="1">
                 <a:solidFill>
                   <a:srgbClr val="F3EFE5"/>
                 </a:solidFill>
@@ -6462,8 +6462,8 @@
         </p:nvSpPr>
         <p:spPr>
           <a:xfrm>
-            <a:off x="4636008" y="4526280"/>
-            <a:ext cx="3063240" cy="274320"/>
+            <a:off x="3637711" y="4526280"/>
+            <a:ext cx="2165527" cy="320040"/>
           </a:xfrm>
           <a:prstGeom prst="rect">
             <a:avLst/>
@@ -6478,7 +6478,7 @@
           <a:p>
             <a:pPr algn="l"/>
             <a:r>
-              <a:rPr sz="900" b="0" spc="120">
+              <a:rPr sz="850" b="0" spc="120">
                 <a:solidFill>
                   <a:srgbClr val="8A8A86"/>
                 </a:solidFill>
@@ -6497,8 +6497,8 @@
         </p:nvSpPr>
         <p:spPr>
           <a:xfrm>
-            <a:off x="8129016" y="3611880"/>
-            <a:ext cx="3520440" cy="1371600"/>
+            <a:off x="6187287" y="3611880"/>
+            <a:ext cx="2567863" cy="1371600"/>
           </a:xfrm>
           <a:prstGeom prst="rect">
             <a:avLst/>
@@ -6541,8 +6541,8 @@
         </p:nvSpPr>
         <p:spPr>
           <a:xfrm>
-            <a:off x="8357616" y="3840480"/>
-            <a:ext cx="3063240" cy="640080"/>
+            <a:off x="6388455" y="3840480"/>
+            <a:ext cx="2165527" cy="640080"/>
           </a:xfrm>
           <a:prstGeom prst="rect">
             <a:avLst/>
@@ -6557,7 +6557,7 @@
           <a:p>
             <a:pPr algn="l"/>
             <a:r>
-              <a:rPr sz="3400" b="1">
+              <a:rPr sz="2800" b="1">
                 <a:solidFill>
                   <a:srgbClr val="F3EFE5"/>
                 </a:solidFill>
@@ -6576,8 +6576,8 @@
         </p:nvSpPr>
         <p:spPr>
           <a:xfrm>
-            <a:off x="8357616" y="4526280"/>
-            <a:ext cx="3063240" cy="274320"/>
+            <a:off x="6388455" y="4526280"/>
+            <a:ext cx="2165527" cy="320040"/>
           </a:xfrm>
           <a:prstGeom prst="rect">
             <a:avLst/>
@@ -6592,7 +6592,7 @@
           <a:p>
             <a:pPr algn="l"/>
             <a:r>
-              <a:rPr sz="900" b="0" spc="120">
+              <a:rPr sz="850" b="0" spc="120">
                 <a:solidFill>
                   <a:srgbClr val="8A8A86"/>
                 </a:solidFill>
@@ -6605,7 +6605,121 @@
       </p:sp>
       <p:sp>
         <p:nvSpPr>
-          <p:cNvPr id="18" name="TextBox 17"/>
+          <p:cNvPr id="18" name="Rectangle 17"/>
+          <p:cNvSpPr/>
+          <p:nvPr/>
+        </p:nvSpPr>
+        <p:spPr>
+          <a:xfrm>
+            <a:off x="8938031" y="3611880"/>
+            <a:ext cx="2567863" cy="1371600"/>
+          </a:xfrm>
+          <a:prstGeom prst="rect">
+            <a:avLst/>
+          </a:prstGeom>
+          <a:solidFill>
+            <a:srgbClr val="161616"/>
+          </a:solidFill>
+          <a:ln>
+            <a:noFill/>
+          </a:ln>
+          <a:effectLst/>
+        </p:spPr>
+        <p:style>
+          <a:lnRef idx="1">
+            <a:schemeClr val="accent1"/>
+          </a:lnRef>
+          <a:fillRef idx="3">
+            <a:schemeClr val="accent1"/>
+          </a:fillRef>
+          <a:effectRef idx="2">
+            <a:schemeClr val="accent1"/>
+          </a:effectRef>
+          <a:fontRef idx="minor">
+            <a:schemeClr val="lt1"/>
+          </a:fontRef>
+        </p:style>
+        <p:txBody>
+          <a:bodyPr rtlCol="0" anchor="ctr"/>
+          <a:lstStyle/>
+          <a:p>
+            <a:pPr algn="ctr"/>
+          </a:p>
+        </p:txBody>
+      </p:sp>
+      <p:sp>
+        <p:nvSpPr>
+          <p:cNvPr id="19" name="TextBox 18"/>
+          <p:cNvSpPr txBox="1"/>
+          <p:nvPr/>
+        </p:nvSpPr>
+        <p:spPr>
+          <a:xfrm>
+            <a:off x="9139199" y="3840480"/>
+            <a:ext cx="2165527" cy="640080"/>
+          </a:xfrm>
+          <a:prstGeom prst="rect">
+            <a:avLst/>
+          </a:prstGeom>
+          <a:noFill/>
+        </p:spPr>
+        <p:txBody>
+          <a:bodyPr wrap="square" anchor="t" lIns="0" rIns="0" tIns="0" bIns="0">
+            <a:spAutoFit/>
+          </a:bodyPr>
+          <a:lstStyle/>
+          <a:p>
+            <a:pPr algn="l"/>
+            <a:r>
+              <a:rPr sz="2800" b="1">
+                <a:solidFill>
+                  <a:srgbClr val="FFD400"/>
+                </a:solidFill>
+                <a:latin typeface="Arial"/>
+              </a:rPr>
+              <a:t>US$ 0,89</a:t>
+            </a:r>
+          </a:p>
+        </p:txBody>
+      </p:sp>
+      <p:sp>
+        <p:nvSpPr>
+          <p:cNvPr id="20" name="TextBox 19"/>
+          <p:cNvSpPr txBox="1"/>
+          <p:nvPr/>
+        </p:nvSpPr>
+        <p:spPr>
+          <a:xfrm>
+            <a:off x="9139199" y="4526280"/>
+            <a:ext cx="2165527" cy="320040"/>
+          </a:xfrm>
+          <a:prstGeom prst="rect">
+            <a:avLst/>
+          </a:prstGeom>
+          <a:noFill/>
+        </p:spPr>
+        <p:txBody>
+          <a:bodyPr wrap="square" anchor="t" lIns="0" rIns="0" tIns="0" bIns="0">
+            <a:spAutoFit/>
+          </a:bodyPr>
+          <a:lstStyle/>
+          <a:p>
+            <a:pPr algn="l"/>
+            <a:r>
+              <a:rPr sz="850" b="0" spc="120">
+                <a:solidFill>
+                  <a:srgbClr val="8A8A86"/>
+                </a:solidFill>
+                <a:latin typeface="Courier New"/>
+              </a:rPr>
+              <a:t>CUSTO TOTAL</a:t>
+            </a:r>
+          </a:p>
+        </p:txBody>
+      </p:sp>
+      <p:sp>
+        <p:nvSpPr>
+          <p:cNvPr id="21" name="TextBox 20"/>
           <p:cNvSpPr txBox="1"/>
           <p:nvPr/>
         </p:nvSpPr>
@@ -8132,8 +8246,8 @@
         </p:nvSpPr>
         <p:spPr>
           <a:xfrm>
-            <a:off x="685800" y="2148840"/>
-            <a:ext cx="2377440" cy="320040"/>
+            <a:off x="685800" y="1874519"/>
+            <a:ext cx="2377440" cy="292608"/>
           </a:xfrm>
           <a:prstGeom prst="rect">
             <a:avLst/>
@@ -8148,7 +8262,7 @@
           <a:p>
             <a:pPr algn="l"/>
             <a:r>
-              <a:rPr sz="950" b="0" spc="120">
+              <a:rPr sz="900" b="0" spc="120">
                 <a:solidFill>
                   <a:srgbClr val="8A8A86"/>
                 </a:solidFill>
@@ -8167,8 +8281,8 @@
         </p:nvSpPr>
         <p:spPr>
           <a:xfrm>
-            <a:off x="3246120" y="2112264"/>
-            <a:ext cx="8259775" cy="731520"/>
+            <a:off x="3246120" y="1837943"/>
+            <a:ext cx="8259775" cy="658368"/>
           </a:xfrm>
           <a:prstGeom prst="rect">
             <a:avLst/>
@@ -8183,11 +8297,11 @@
           <a:p>
             <a:pPr algn="l">
               <a:lnSpc>
-                <a:spcPct val="130000"/>
+                <a:spcPct val="128000"/>
               </a:lnSpc>
             </a:pPr>
             <a:r>
-              <a:rPr sz="1300" b="0">
+              <a:rPr sz="1250" b="0">
                 <a:solidFill>
                   <a:srgbClr val="F3EFE5"/>
                 </a:solidFill>
@@ -8206,7 +8320,7 @@
         </p:nvSpPr>
         <p:spPr>
           <a:xfrm>
-            <a:off x="685800" y="2715768"/>
+            <a:off x="685800" y="2404872"/>
             <a:ext cx="10820095" cy="10972"/>
           </a:xfrm>
           <a:prstGeom prst="rect">
@@ -8250,8 +8364,8 @@
         </p:nvSpPr>
         <p:spPr>
           <a:xfrm>
-            <a:off x="685800" y="2990088"/>
-            <a:ext cx="2377440" cy="320040"/>
+            <a:off x="685800" y="2624327"/>
+            <a:ext cx="2377440" cy="292608"/>
           </a:xfrm>
           <a:prstGeom prst="rect">
             <a:avLst/>
@@ -8266,7 +8380,7 @@
           <a:p>
             <a:pPr algn="l"/>
             <a:r>
-              <a:rPr sz="950" b="0" spc="120">
+              <a:rPr sz="900" b="0" spc="120">
                 <a:solidFill>
                   <a:srgbClr val="8A8A86"/>
                 </a:solidFill>
@@ -8285,8 +8399,8 @@
         </p:nvSpPr>
         <p:spPr>
           <a:xfrm>
-            <a:off x="3246120" y="2953512"/>
-            <a:ext cx="8259775" cy="731520"/>
+            <a:off x="3246120" y="2587751"/>
+            <a:ext cx="8259775" cy="658368"/>
           </a:xfrm>
           <a:prstGeom prst="rect">
             <a:avLst/>
@@ -8301,11 +8415,11 @@
           <a:p>
             <a:pPr algn="l">
               <a:lnSpc>
-                <a:spcPct val="130000"/>
+                <a:spcPct val="128000"/>
               </a:lnSpc>
             </a:pPr>
             <a:r>
-              <a:rPr sz="1300" b="0">
+              <a:rPr sz="1250" b="0">
                 <a:solidFill>
                   <a:srgbClr val="F3EFE5"/>
                 </a:solidFill>
@@ -8324,7 +8438,7 @@
         </p:nvSpPr>
         <p:spPr>
           <a:xfrm>
-            <a:off x="685800" y="3557016"/>
+            <a:off x="685800" y="3154679"/>
             <a:ext cx="10820095" cy="10972"/>
           </a:xfrm>
           <a:prstGeom prst="rect">
@@ -8368,8 +8482,8 @@
         </p:nvSpPr>
         <p:spPr>
           <a:xfrm>
-            <a:off x="685800" y="3831336"/>
-            <a:ext cx="2377440" cy="320040"/>
+            <a:off x="685800" y="3374135"/>
+            <a:ext cx="2377440" cy="292608"/>
           </a:xfrm>
           <a:prstGeom prst="rect">
             <a:avLst/>
@@ -8384,7 +8498,7 @@
           <a:p>
             <a:pPr algn="l"/>
             <a:r>
-              <a:rPr sz="950" b="0" spc="120">
+              <a:rPr sz="900" b="0" spc="120">
                 <a:solidFill>
                   <a:srgbClr val="8A8A86"/>
                 </a:solidFill>
@@ -8403,8 +8517,8 @@
         </p:nvSpPr>
         <p:spPr>
           <a:xfrm>
-            <a:off x="3246120" y="3794760"/>
-            <a:ext cx="8259775" cy="731520"/>
+            <a:off x="3246120" y="3337559"/>
+            <a:ext cx="8259775" cy="658368"/>
           </a:xfrm>
           <a:prstGeom prst="rect">
             <a:avLst/>
@@ -8419,11 +8533,11 @@
           <a:p>
             <a:pPr algn="l">
               <a:lnSpc>
-                <a:spcPct val="130000"/>
+                <a:spcPct val="128000"/>
               </a:lnSpc>
             </a:pPr>
             <a:r>
-              <a:rPr sz="1300" b="0">
+              <a:rPr sz="1250" b="0">
                 <a:solidFill>
                   <a:srgbClr val="F3EFE5"/>
                 </a:solidFill>
@@ -8442,7 +8556,7 @@
         </p:nvSpPr>
         <p:spPr>
           <a:xfrm>
-            <a:off x="685800" y="4398264"/>
+            <a:off x="685800" y="3904487"/>
             <a:ext cx="10820095" cy="10972"/>
           </a:xfrm>
           <a:prstGeom prst="rect">
@@ -8486,8 +8600,8 @@
         </p:nvSpPr>
         <p:spPr>
           <a:xfrm>
-            <a:off x="685800" y="4672584"/>
-            <a:ext cx="2377440" cy="320040"/>
+            <a:off x="685800" y="4123944"/>
+            <a:ext cx="2377440" cy="292608"/>
           </a:xfrm>
           <a:prstGeom prst="rect">
             <a:avLst/>
@@ -8502,7 +8616,7 @@
           <a:p>
             <a:pPr algn="l"/>
             <a:r>
-              <a:rPr sz="950" b="0" spc="120">
+              <a:rPr sz="900" b="0" spc="120">
                 <a:solidFill>
                   <a:srgbClr val="8A8A86"/>
                 </a:solidFill>
@@ -8521,8 +8635,8 @@
         </p:nvSpPr>
         <p:spPr>
           <a:xfrm>
-            <a:off x="3246120" y="4636008"/>
-            <a:ext cx="8259775" cy="731520"/>
+            <a:off x="3246120" y="4087368"/>
+            <a:ext cx="8259775" cy="658368"/>
           </a:xfrm>
           <a:prstGeom prst="rect">
             <a:avLst/>
@@ -8537,11 +8651,11 @@
           <a:p>
             <a:pPr algn="l">
               <a:lnSpc>
-                <a:spcPct val="130000"/>
+                <a:spcPct val="128000"/>
               </a:lnSpc>
             </a:pPr>
             <a:r>
-              <a:rPr sz="1300" b="0">
+              <a:rPr sz="1250" b="0">
                 <a:solidFill>
                   <a:srgbClr val="F3EFE5"/>
                 </a:solidFill>
@@ -8560,7 +8674,7 @@
         </p:nvSpPr>
         <p:spPr>
           <a:xfrm>
-            <a:off x="685800" y="5239512"/>
+            <a:off x="685800" y="4654296"/>
             <a:ext cx="10820095" cy="10972"/>
           </a:xfrm>
           <a:prstGeom prst="rect">
@@ -8604,8 +8718,8 @@
         </p:nvSpPr>
         <p:spPr>
           <a:xfrm>
-            <a:off x="685800" y="5513832"/>
-            <a:ext cx="2377440" cy="320040"/>
+            <a:off x="685800" y="4873752"/>
+            <a:ext cx="2377440" cy="292608"/>
           </a:xfrm>
           <a:prstGeom prst="rect">
             <a:avLst/>
@@ -8620,13 +8734,13 @@
           <a:p>
             <a:pPr algn="l"/>
             <a:r>
-              <a:rPr sz="950" b="0" spc="120">
+              <a:rPr sz="900" b="0" spc="120">
                 <a:solidFill>
                   <a:srgbClr val="8A8A86"/>
                 </a:solidFill>
                 <a:latin typeface="Courier New"/>
               </a:rPr>
-              <a:t>DEFENSIBILIDADE</a:t>
+              <a:t>CUSTO DE EXECUÇÃO</a:t>
             </a:r>
           </a:p>
         </p:txBody>
@@ -8639,8 +8753,8 @@
         </p:nvSpPr>
         <p:spPr>
           <a:xfrm>
-            <a:off x="3246120" y="5477256"/>
-            <a:ext cx="8259775" cy="731520"/>
+            <a:off x="3246120" y="4837176"/>
+            <a:ext cx="8259775" cy="658368"/>
           </a:xfrm>
           <a:prstGeom prst="rect">
             <a:avLst/>
@@ -8655,17 +8769,17 @@
           <a:p>
             <a:pPr algn="l">
               <a:lnSpc>
-                <a:spcPct val="130000"/>
+                <a:spcPct val="128000"/>
               </a:lnSpc>
             </a:pPr>
             <a:r>
-              <a:rPr sz="1300" b="0">
+              <a:rPr sz="1250" b="0">
                 <a:solidFill>
                   <a:srgbClr val="F3EFE5"/>
                 </a:solidFill>
                 <a:latin typeface="Arial"/>
               </a:rPr>
-              <a:t>Cada campanha devolve o que converteu, para quem e com qual mecanismo. Copia-se o prompt numa tarde; não se copia o histórico.</a:t>
+              <a:t>Uma análise de mercado completa custou US$ 0,89. Medido, não estimado.</a:t>
             </a:r>
           </a:p>
         </p:txBody>
@@ -8678,7 +8792,125 @@
         </p:nvSpPr>
         <p:spPr>
           <a:xfrm>
-            <a:off x="685800" y="6080760"/>
+            <a:off x="685800" y="5404104"/>
+            <a:ext cx="10820095" cy="10972"/>
+          </a:xfrm>
+          <a:prstGeom prst="rect">
+            <a:avLst/>
+          </a:prstGeom>
+          <a:solidFill>
+            <a:srgbClr val="2A2A28"/>
+          </a:solidFill>
+          <a:ln>
+            <a:noFill/>
+          </a:ln>
+          <a:effectLst/>
+        </p:spPr>
+        <p:style>
+          <a:lnRef idx="1">
+            <a:schemeClr val="accent1"/>
+          </a:lnRef>
+          <a:fillRef idx="3">
+            <a:schemeClr val="accent1"/>
+          </a:fillRef>
+          <a:effectRef idx="2">
+            <a:schemeClr val="accent1"/>
+          </a:effectRef>
+          <a:fontRef idx="minor">
+            <a:schemeClr val="lt1"/>
+          </a:fontRef>
+        </p:style>
+        <p:txBody>
+          <a:bodyPr rtlCol="0" anchor="ctr"/>
+          <a:lstStyle/>
+          <a:p>
+            <a:pPr algn="ctr"/>
+          </a:p>
+        </p:txBody>
+      </p:sp>
+      <p:sp>
+        <p:nvSpPr>
+          <p:cNvPr id="20" name="TextBox 19"/>
+          <p:cNvSpPr txBox="1"/>
+          <p:nvPr/>
+        </p:nvSpPr>
+        <p:spPr>
+          <a:xfrm>
+            <a:off x="685800" y="5623560"/>
+            <a:ext cx="2377440" cy="292608"/>
+          </a:xfrm>
+          <a:prstGeom prst="rect">
+            <a:avLst/>
+          </a:prstGeom>
+          <a:noFill/>
+        </p:spPr>
+        <p:txBody>
+          <a:bodyPr wrap="square" anchor="t" lIns="0" rIns="0" tIns="0" bIns="0">
+            <a:spAutoFit/>
+          </a:bodyPr>
+          <a:lstStyle/>
+          <a:p>
+            <a:pPr algn="l"/>
+            <a:r>
+              <a:rPr sz="900" b="0" spc="120">
+                <a:solidFill>
+                  <a:srgbClr val="8A8A86"/>
+                </a:solidFill>
+                <a:latin typeface="Courier New"/>
+              </a:rPr>
+              <a:t>DEFENSIBILIDADE</a:t>
+            </a:r>
+          </a:p>
+        </p:txBody>
+      </p:sp>
+      <p:sp>
+        <p:nvSpPr>
+          <p:cNvPr id="21" name="TextBox 20"/>
+          <p:cNvSpPr txBox="1"/>
+          <p:nvPr/>
+        </p:nvSpPr>
+        <p:spPr>
+          <a:xfrm>
+            <a:off x="3246120" y="5586984"/>
+            <a:ext cx="8259775" cy="658368"/>
+          </a:xfrm>
+          <a:prstGeom prst="rect">
+            <a:avLst/>
+          </a:prstGeom>
+          <a:noFill/>
+        </p:spPr>
+        <p:txBody>
+          <a:bodyPr wrap="square" anchor="t" lIns="0" rIns="0" tIns="0" bIns="0">
+            <a:spAutoFit/>
+          </a:bodyPr>
+          <a:lstStyle/>
+          <a:p>
+            <a:pPr algn="l">
+              <a:lnSpc>
+                <a:spcPct val="128000"/>
+              </a:lnSpc>
+            </a:pPr>
+            <a:r>
+              <a:rPr sz="1250" b="0">
+                <a:solidFill>
+                  <a:srgbClr val="F3EFE5"/>
+                </a:solidFill>
+                <a:latin typeface="Arial"/>
+              </a:rPr>
+              <a:t>Cada campanha devolve o que converteu, para quem e com qual mecanismo. Copia-se o prompt numa tarde; não se copia o histórico.</a:t>
+            </a:r>
+          </a:p>
+        </p:txBody>
+      </p:sp>
+      <p:sp>
+        <p:nvSpPr>
+          <p:cNvPr id="22" name="Rectangle 21"/>
+          <p:cNvSpPr/>
+          <p:nvPr/>
+        </p:nvSpPr>
+        <p:spPr>
+          <a:xfrm>
+            <a:off x="685800" y="6153912"/>
             <a:ext cx="10820095" cy="10972"/>
           </a:xfrm>
           <a:prstGeom prst="rect">

--- a/deck/BrandLoop-deck.pptx
+++ b/deck/BrandLoop-deck.pptx
@@ -12,7 +12,6 @@
     <p:sldId id="260" r:id="rId12"/>
     <p:sldId id="261" r:id="rId13"/>
     <p:sldId id="262" r:id="rId14"/>
-    <p:sldId id="263" r:id="rId15"/>
   </p:sldIdLst>
   <p:sldSz cx="12191695" cy="6858000" type="screen4x3"/>
   <p:notesSz cx="6858000" cy="9144000"/>
@@ -930,76 +929,6 @@
           <a:p>
             <a:r>
               <a:t>2:45–3:00 — Fecho. Benchmark, não cliente.</a:t>
-            </a:r>
-          </a:p>
-        </p:txBody>
-      </p:sp>
-      <p:sp>
-        <p:nvSpPr>
-          <p:cNvPr id="4" name="Slide Number Placeholder 3"/>
-          <p:cNvSpPr>
-            <a:spLocks noGrp="1"/>
-          </p:cNvSpPr>
-          <p:nvPr>
-            <p:ph type="sldNum" idx="5" sz="quarter"/>
-          </p:nvPr>
-        </p:nvSpPr>
-        <p:spPr/>
-      </p:sp>
-    </p:spTree>
-  </p:cSld>
-  <p:clrMapOvr>
-    <a:masterClrMapping/>
-  </p:clrMapOvr>
-</p:notes>
-</file>
-
-<file path=ppt/notesSlides/notesSlide8.xml><?xml version="1.0" encoding="utf-8"?>
-<p:notes xmlns:a="http://schemas.openxmlformats.org/drawingml/2006/main" xmlns:p="http://schemas.openxmlformats.org/presentationml/2006/main" xmlns:r="http://schemas.openxmlformats.org/officeDocument/2006/relationships">
-  <p:cSld>
-    <p:spTree>
-      <p:nvGrpSpPr>
-        <p:cNvPr id="1" name=""/>
-        <p:cNvGrpSpPr/>
-        <p:nvPr/>
-      </p:nvGrpSpPr>
-      <p:grpSpPr>
-        <a:xfrm>
-          <a:off x="0" y="0"/>
-          <a:ext cx="0" cy="0"/>
-          <a:chOff x="0" y="0"/>
-          <a:chExt cx="0" cy="0"/>
-        </a:xfrm>
-      </p:grpSpPr>
-      <p:sp>
-        <p:nvSpPr>
-          <p:cNvPr id="2" name="Slide Image Placeholder 1"/>
-          <p:cNvSpPr>
-            <a:spLocks noGrp="1"/>
-          </p:cNvSpPr>
-          <p:nvPr>
-            <p:ph type="sldImg" idx="2"/>
-          </p:nvPr>
-        </p:nvSpPr>
-        <p:spPr/>
-      </p:sp>
-      <p:sp>
-        <p:nvSpPr>
-          <p:cNvPr id="3" name="Notes Placeholder 2"/>
-          <p:cNvSpPr>
-            <a:spLocks noGrp="1"/>
-          </p:cNvSpPr>
-          <p:nvPr>
-            <p:ph type="body" idx="3" sz="quarter"/>
-          </p:nvPr>
-        </p:nvSpPr>
-        <p:spPr/>
-        <p:txBody>
-          <a:bodyPr/>
-          <a:lstStyle/>
-          <a:p>
-            <a:r>
-              <a:t>Slide de backup. Só abrir se perguntarem o que é real.</a:t>
             </a:r>
           </a:p>
         </p:txBody>
@@ -9161,556 +9090,6 @@
                 <a:latin typeface="Arial"/>
               </a:rPr>
               <a:t>Não somos a agência do iFood — ele é o caso mais difícil do Brasil agora, e vocês conseguem verificar tudo o que o agente concluiu.</a:t>
-            </a:r>
-          </a:p>
-        </p:txBody>
-      </p:sp>
-    </p:spTree>
-  </p:cSld>
-  <p:clrMapOvr>
-    <a:masterClrMapping/>
-  </p:clrMapOvr>
-</p:sld>
-</file>
-
-<file path=ppt/slides/slide8.xml><?xml version="1.0" encoding="utf-8"?>
-<p:sld xmlns:a="http://schemas.openxmlformats.org/drawingml/2006/main" xmlns:p="http://schemas.openxmlformats.org/presentationml/2006/main" xmlns:r="http://schemas.openxmlformats.org/officeDocument/2006/relationships">
-  <p:cSld>
-    <p:spTree>
-      <p:nvGrpSpPr>
-        <p:cNvPr id="1" name=""/>
-        <p:cNvGrpSpPr/>
-        <p:nvPr/>
-      </p:nvGrpSpPr>
-      <p:grpSpPr/>
-      <p:sp>
-        <p:nvSpPr>
-          <p:cNvPr id="2" name="Rectangle 1"/>
-          <p:cNvSpPr/>
-          <p:nvPr/>
-        </p:nvSpPr>
-        <p:spPr>
-          <a:xfrm>
-            <a:off x="0" y="0"/>
-            <a:ext cx="12191695" cy="6858000"/>
-          </a:xfrm>
-          <a:prstGeom prst="rect">
-            <a:avLst/>
-          </a:prstGeom>
-          <a:solidFill>
-            <a:srgbClr val="0A0A0A"/>
-          </a:solidFill>
-          <a:ln>
-            <a:noFill/>
-          </a:ln>
-          <a:effectLst/>
-        </p:spPr>
-        <p:style>
-          <a:lnRef idx="1">
-            <a:schemeClr val="accent1"/>
-          </a:lnRef>
-          <a:fillRef idx="3">
-            <a:schemeClr val="accent1"/>
-          </a:fillRef>
-          <a:effectRef idx="2">
-            <a:schemeClr val="accent1"/>
-          </a:effectRef>
-          <a:fontRef idx="minor">
-            <a:schemeClr val="lt1"/>
-          </a:fontRef>
-        </p:style>
-        <p:txBody>
-          <a:bodyPr rtlCol="0" anchor="ctr"/>
-          <a:lstStyle/>
-          <a:p>
-            <a:pPr algn="ctr"/>
-          </a:p>
-        </p:txBody>
-      </p:sp>
-      <p:sp>
-        <p:nvSpPr>
-          <p:cNvPr id="3" name="TextBox 2"/>
-          <p:cNvSpPr txBox="1"/>
-          <p:nvPr/>
-        </p:nvSpPr>
-        <p:spPr>
-          <a:xfrm>
-            <a:off x="685800" y="548640"/>
-            <a:ext cx="8229600" cy="228600"/>
-          </a:xfrm>
-          <a:prstGeom prst="rect">
-            <a:avLst/>
-          </a:prstGeom>
-          <a:noFill/>
-        </p:spPr>
-        <p:txBody>
-          <a:bodyPr wrap="square" anchor="t" lIns="0" rIns="0" tIns="0" bIns="0">
-            <a:spAutoFit/>
-          </a:bodyPr>
-          <a:lstStyle/>
-          <a:p>
-            <a:pPr algn="l"/>
-            <a:r>
-              <a:rPr sz="900" b="0" spc="120">
-                <a:solidFill>
-                  <a:srgbClr val="8A8A86"/>
-                </a:solidFill>
-                <a:latin typeface="Courier New"/>
-              </a:rPr>
-              <a:t>BACKUP — NÃO APRESENTAR · ABRIR SE PERGUNTAREM</a:t>
-            </a:r>
-          </a:p>
-        </p:txBody>
-      </p:sp>
-      <p:sp>
-        <p:nvSpPr>
-          <p:cNvPr id="4" name="TextBox 3"/>
-          <p:cNvSpPr txBox="1"/>
-          <p:nvPr/>
-        </p:nvSpPr>
-        <p:spPr>
-          <a:xfrm>
-            <a:off x="685800" y="960120"/>
-            <a:ext cx="9601200" cy="731520"/>
-          </a:xfrm>
-          <a:prstGeom prst="rect">
-            <a:avLst/>
-          </a:prstGeom>
-          <a:noFill/>
-        </p:spPr>
-        <p:txBody>
-          <a:bodyPr wrap="square" anchor="t" lIns="0" rIns="0" tIns="0" bIns="0">
-            <a:spAutoFit/>
-          </a:bodyPr>
-          <a:lstStyle/>
-          <a:p>
-            <a:pPr algn="l"/>
-            <a:r>
-              <a:rPr sz="3000" b="1">
-                <a:solidFill>
-                  <a:srgbClr val="F3EFE5"/>
-                </a:solidFill>
-                <a:latin typeface="Arial"/>
-              </a:rPr>
-              <a:t>O que é real e o que é simulado</a:t>
-            </a:r>
-          </a:p>
-        </p:txBody>
-      </p:sp>
-      <p:sp>
-        <p:nvSpPr>
-          <p:cNvPr id="5" name="TextBox 4"/>
-          <p:cNvSpPr txBox="1"/>
-          <p:nvPr/>
-        </p:nvSpPr>
-        <p:spPr>
-          <a:xfrm>
-            <a:off x="685800" y="2103120"/>
-            <a:ext cx="1371600" cy="274320"/>
-          </a:xfrm>
-          <a:prstGeom prst="rect">
-            <a:avLst/>
-          </a:prstGeom>
-          <a:noFill/>
-        </p:spPr>
-        <p:txBody>
-          <a:bodyPr wrap="square" anchor="t" lIns="0" rIns="0" tIns="0" bIns="0">
-            <a:spAutoFit/>
-          </a:bodyPr>
-          <a:lstStyle/>
-          <a:p>
-            <a:pPr algn="l"/>
-            <a:r>
-              <a:rPr sz="900" b="1" spc="120">
-                <a:solidFill>
-                  <a:srgbClr val="9FF5D0"/>
-                </a:solidFill>
-                <a:latin typeface="Courier New"/>
-              </a:rPr>
-              <a:t>REAL</a:t>
-            </a:r>
-          </a:p>
-        </p:txBody>
-      </p:sp>
-      <p:sp>
-        <p:nvSpPr>
-          <p:cNvPr id="6" name="TextBox 5"/>
-          <p:cNvSpPr txBox="1"/>
-          <p:nvPr/>
-        </p:nvSpPr>
-        <p:spPr>
-          <a:xfrm>
-            <a:off x="2240280" y="2057400"/>
-            <a:ext cx="9265615" cy="548640"/>
-          </a:xfrm>
-          <a:prstGeom prst="rect">
-            <a:avLst/>
-          </a:prstGeom>
-          <a:noFill/>
-        </p:spPr>
-        <p:txBody>
-          <a:bodyPr wrap="square" anchor="t" lIns="0" rIns="0" tIns="0" bIns="0">
-            <a:spAutoFit/>
-          </a:bodyPr>
-          <a:lstStyle/>
-          <a:p>
-            <a:pPr algn="l">
-              <a:lnSpc>
-                <a:spcPct val="130000"/>
-              </a:lnSpc>
-            </a:pPr>
-            <a:r>
-              <a:rPr sz="1250" b="0">
-                <a:solidFill>
-                  <a:srgbClr val="F3EFE5"/>
-                </a:solidFill>
-                <a:latin typeface="Arial"/>
-              </a:rPr>
-              <a:t>Contexto e entrevista — /api/ingest e /api/interview, adapter Anthropic + OpenAI</a:t>
-            </a:r>
-          </a:p>
-        </p:txBody>
-      </p:sp>
-      <p:sp>
-        <p:nvSpPr>
-          <p:cNvPr id="7" name="TextBox 6"/>
-          <p:cNvSpPr txBox="1"/>
-          <p:nvPr/>
-        </p:nvSpPr>
-        <p:spPr>
-          <a:xfrm>
-            <a:off x="685800" y="2788920"/>
-            <a:ext cx="1371600" cy="274320"/>
-          </a:xfrm>
-          <a:prstGeom prst="rect">
-            <a:avLst/>
-          </a:prstGeom>
-          <a:noFill/>
-        </p:spPr>
-        <p:txBody>
-          <a:bodyPr wrap="square" anchor="t" lIns="0" rIns="0" tIns="0" bIns="0">
-            <a:spAutoFit/>
-          </a:bodyPr>
-          <a:lstStyle/>
-          <a:p>
-            <a:pPr algn="l"/>
-            <a:r>
-              <a:rPr sz="900" b="1" spc="120">
-                <a:solidFill>
-                  <a:srgbClr val="9FF5D0"/>
-                </a:solidFill>
-                <a:latin typeface="Courier New"/>
-              </a:rPr>
-              <a:t>REAL</a:t>
-            </a:r>
-          </a:p>
-        </p:txBody>
-      </p:sp>
-      <p:sp>
-        <p:nvSpPr>
-          <p:cNvPr id="8" name="TextBox 7"/>
-          <p:cNvSpPr txBox="1"/>
-          <p:nvPr/>
-        </p:nvSpPr>
-        <p:spPr>
-          <a:xfrm>
-            <a:off x="2240280" y="2743200"/>
-            <a:ext cx="9265615" cy="548640"/>
-          </a:xfrm>
-          <a:prstGeom prst="rect">
-            <a:avLst/>
-          </a:prstGeom>
-          <a:noFill/>
-        </p:spPr>
-        <p:txBody>
-          <a:bodyPr wrap="square" anchor="t" lIns="0" rIns="0" tIns="0" bIns="0">
-            <a:spAutoFit/>
-          </a:bodyPr>
-          <a:lstStyle/>
-          <a:p>
-            <a:pPr algn="l">
-              <a:lnSpc>
-                <a:spcPct val="130000"/>
-              </a:lnSpc>
-            </a:pPr>
-            <a:r>
-              <a:rPr sz="1250" b="0">
-                <a:solidFill>
-                  <a:srgbClr val="F3EFE5"/>
-                </a:solidFill>
-                <a:latin typeface="Arial"/>
-              </a:rPr>
-              <a:t>Análise de mercado — /api/research, Gorilla API, 1.516 conversas, search_id verificável</a:t>
-            </a:r>
-          </a:p>
-        </p:txBody>
-      </p:sp>
-      <p:sp>
-        <p:nvSpPr>
-          <p:cNvPr id="9" name="TextBox 8"/>
-          <p:cNvSpPr txBox="1"/>
-          <p:nvPr/>
-        </p:nvSpPr>
-        <p:spPr>
-          <a:xfrm>
-            <a:off x="685800" y="3474720"/>
-            <a:ext cx="1371600" cy="274320"/>
-          </a:xfrm>
-          <a:prstGeom prst="rect">
-            <a:avLst/>
-          </a:prstGeom>
-          <a:noFill/>
-        </p:spPr>
-        <p:txBody>
-          <a:bodyPr wrap="square" anchor="t" lIns="0" rIns="0" tIns="0" bIns="0">
-            <a:spAutoFit/>
-          </a:bodyPr>
-          <a:lstStyle/>
-          <a:p>
-            <a:pPr algn="l"/>
-            <a:r>
-              <a:rPr sz="900" b="1" spc="120">
-                <a:solidFill>
-                  <a:srgbClr val="9FF5D0"/>
-                </a:solidFill>
-                <a:latin typeface="Courier New"/>
-              </a:rPr>
-              <a:t>REAL</a:t>
-            </a:r>
-          </a:p>
-        </p:txBody>
-      </p:sp>
-      <p:sp>
-        <p:nvSpPr>
-          <p:cNvPr id="10" name="TextBox 9"/>
-          <p:cNvSpPr txBox="1"/>
-          <p:nvPr/>
-        </p:nvSpPr>
-        <p:spPr>
-          <a:xfrm>
-            <a:off x="2240280" y="3429000"/>
-            <a:ext cx="9265615" cy="548640"/>
-          </a:xfrm>
-          <a:prstGeom prst="rect">
-            <a:avLst/>
-          </a:prstGeom>
-          <a:noFill/>
-        </p:spPr>
-        <p:txBody>
-          <a:bodyPr wrap="square" anchor="t" lIns="0" rIns="0" tIns="0" bIns="0">
-            <a:spAutoFit/>
-          </a:bodyPr>
-          <a:lstStyle/>
-          <a:p>
-            <a:pPr algn="l">
-              <a:lnSpc>
-                <a:spcPct val="130000"/>
-              </a:lnSpc>
-            </a:pPr>
-            <a:r>
-              <a:rPr sz="1250" b="0">
-                <a:solidFill>
-                  <a:srgbClr val="F3EFE5"/>
-                </a:solidFill>
-                <a:latin typeface="Arial"/>
-              </a:rPr>
-              <a:t>Roteiro e criativo — /api/copy e /api/video, providers plugáveis</a:t>
-            </a:r>
-          </a:p>
-        </p:txBody>
-      </p:sp>
-      <p:sp>
-        <p:nvSpPr>
-          <p:cNvPr id="11" name="TextBox 10"/>
-          <p:cNvSpPr txBox="1"/>
-          <p:nvPr/>
-        </p:nvSpPr>
-        <p:spPr>
-          <a:xfrm>
-            <a:off x="685800" y="4160520"/>
-            <a:ext cx="1371600" cy="274320"/>
-          </a:xfrm>
-          <a:prstGeom prst="rect">
-            <a:avLst/>
-          </a:prstGeom>
-          <a:noFill/>
-        </p:spPr>
-        <p:txBody>
-          <a:bodyPr wrap="square" anchor="t" lIns="0" rIns="0" tIns="0" bIns="0">
-            <a:spAutoFit/>
-          </a:bodyPr>
-          <a:lstStyle/>
-          <a:p>
-            <a:pPr algn="l"/>
-            <a:r>
-              <a:rPr sz="900" b="1" spc="120">
-                <a:solidFill>
-                  <a:srgbClr val="8A8A86"/>
-                </a:solidFill>
-                <a:latin typeface="Courier New"/>
-              </a:rPr>
-              <a:t>SIMULADO</a:t>
-            </a:r>
-          </a:p>
-        </p:txBody>
-      </p:sp>
-      <p:sp>
-        <p:nvSpPr>
-          <p:cNvPr id="12" name="TextBox 11"/>
-          <p:cNvSpPr txBox="1"/>
-          <p:nvPr/>
-        </p:nvSpPr>
-        <p:spPr>
-          <a:xfrm>
-            <a:off x="2240280" y="4114800"/>
-            <a:ext cx="9265615" cy="548640"/>
-          </a:xfrm>
-          <a:prstGeom prst="rect">
-            <a:avLst/>
-          </a:prstGeom>
-          <a:noFill/>
-        </p:spPr>
-        <p:txBody>
-          <a:bodyPr wrap="square" anchor="t" lIns="0" rIns="0" tIns="0" bIns="0">
-            <a:spAutoFit/>
-          </a:bodyPr>
-          <a:lstStyle/>
-          <a:p>
-            <a:pPr algn="l">
-              <a:lnSpc>
-                <a:spcPct val="130000"/>
-              </a:lnSpc>
-            </a:pPr>
-            <a:r>
-              <a:rPr sz="1250" b="0">
-                <a:solidFill>
-                  <a:srgbClr val="F3EFE5"/>
-                </a:solidFill>
-                <a:latin typeface="Arial"/>
-              </a:rPr>
-              <a:t>Publicação e campanha — simulado: true forçado pelo contrato de tipos</a:t>
-            </a:r>
-          </a:p>
-        </p:txBody>
-      </p:sp>
-      <p:sp>
-        <p:nvSpPr>
-          <p:cNvPr id="13" name="TextBox 12"/>
-          <p:cNvSpPr txBox="1"/>
-          <p:nvPr/>
-        </p:nvSpPr>
-        <p:spPr>
-          <a:xfrm>
-            <a:off x="685800" y="4846320"/>
-            <a:ext cx="1371600" cy="274320"/>
-          </a:xfrm>
-          <a:prstGeom prst="rect">
-            <a:avLst/>
-          </a:prstGeom>
-          <a:noFill/>
-        </p:spPr>
-        <p:txBody>
-          <a:bodyPr wrap="square" anchor="t" lIns="0" rIns="0" tIns="0" bIns="0">
-            <a:spAutoFit/>
-          </a:bodyPr>
-          <a:lstStyle/>
-          <a:p>
-            <a:pPr algn="l"/>
-            <a:r>
-              <a:rPr sz="900" b="1" spc="120">
-                <a:solidFill>
-                  <a:srgbClr val="8A8A86"/>
-                </a:solidFill>
-                <a:latin typeface="Courier New"/>
-              </a:rPr>
-              <a:t>SIMULADO</a:t>
-            </a:r>
-          </a:p>
-        </p:txBody>
-      </p:sp>
-      <p:sp>
-        <p:nvSpPr>
-          <p:cNvPr id="14" name="TextBox 13"/>
-          <p:cNvSpPr txBox="1"/>
-          <p:nvPr/>
-        </p:nvSpPr>
-        <p:spPr>
-          <a:xfrm>
-            <a:off x="2240280" y="4800600"/>
-            <a:ext cx="9265615" cy="548640"/>
-          </a:xfrm>
-          <a:prstGeom prst="rect">
-            <a:avLst/>
-          </a:prstGeom>
-          <a:noFill/>
-        </p:spPr>
-        <p:txBody>
-          <a:bodyPr wrap="square" anchor="t" lIns="0" rIns="0" tIns="0" bIns="0">
-            <a:spAutoFit/>
-          </a:bodyPr>
-          <a:lstStyle/>
-          <a:p>
-            <a:pPr algn="l">
-              <a:lnSpc>
-                <a:spcPct val="130000"/>
-              </a:lnSpc>
-            </a:pPr>
-            <a:r>
-              <a:rPr sz="1250" b="0">
-                <a:solidFill>
-                  <a:srgbClr val="F3EFE5"/>
-                </a:solidFill>
-                <a:latin typeface="Arial"/>
-              </a:rPr>
-              <a:t>Performance — ROAS de 8 semanas não cabe em 5 horas</a:t>
-            </a:r>
-          </a:p>
-        </p:txBody>
-      </p:sp>
-      <p:sp>
-        <p:nvSpPr>
-          <p:cNvPr id="15" name="TextBox 14"/>
-          <p:cNvSpPr txBox="1"/>
-          <p:nvPr/>
-        </p:nvSpPr>
-        <p:spPr>
-          <a:xfrm>
-            <a:off x="685800" y="5715000"/>
-            <a:ext cx="10820095" cy="731520"/>
-          </a:xfrm>
-          <a:prstGeom prst="rect">
-            <a:avLst/>
-          </a:prstGeom>
-          <a:noFill/>
-        </p:spPr>
-        <p:txBody>
-          <a:bodyPr wrap="square" anchor="t" lIns="0" rIns="0" tIns="0" bIns="0">
-            <a:spAutoFit/>
-          </a:bodyPr>
-          <a:lstStyle/>
-          <a:p>
-            <a:pPr algn="l">
-              <a:lnSpc>
-                <a:spcPct val="135000"/>
-              </a:lnSpc>
-            </a:pPr>
-            <a:r>
-              <a:rPr sz="1300" b="0">
-                <a:solidFill>
-                  <a:srgbClr val="A8A49B"/>
-                </a:solidFill>
-                <a:latin typeface="Arial"/>
-              </a:rPr>
-              <a:t>A performance roda em ambiente de simulação — o mesmo harness que usaríamos para evals em produção. </a:t>
-            </a:r>
-            <a:r>
-              <a:rPr sz="1300" b="0">
-                <a:solidFill>
-                  <a:srgbClr val="FFD400"/>
-                </a:solidFill>
-                <a:latin typeface="Arial"/>
-              </a:rPr>
-              <a:t>A diferença entre esconder e escolher é o que estamos mostrando aqui.</a:t>
             </a:r>
           </a:p>
         </p:txBody>

--- a/deck/BrandLoop-deck.pptx
+++ b/deck/BrandLoop-deck.pptx
@@ -12,6 +12,7 @@
     <p:sldId id="260" r:id="rId12"/>
     <p:sldId id="261" r:id="rId13"/>
     <p:sldId id="262" r:id="rId14"/>
+    <p:sldId id="263" r:id="rId15"/>
   </p:sldIdLst>
   <p:sldSz cx="12191695" cy="6858000" type="screen4x3"/>
   <p:notesSz cx="6858000" cy="9144000"/>
@@ -858,7 +859,7 @@
           <a:lstStyle/>
           <a:p>
             <a:r>
-              <a:t>2:20–2:45 — Definir o valor da assinatura antes do pitch.</a:t>
+              <a:t>2:10–2:30 — O argumento nao e o tamanho, e que o dinheiro JA esta sendo gasto.</a:t>
             </a:r>
           </a:p>
         </p:txBody>
@@ -884,6 +885,76 @@
 </file>
 
 <file path=ppt/notesSlides/notesSlide7.xml><?xml version="1.0" encoding="utf-8"?>
+<p:notes xmlns:a="http://schemas.openxmlformats.org/drawingml/2006/main" xmlns:p="http://schemas.openxmlformats.org/presentationml/2006/main" xmlns:r="http://schemas.openxmlformats.org/officeDocument/2006/relationships">
+  <p:cSld>
+    <p:spTree>
+      <p:nvGrpSpPr>
+        <p:cNvPr id="1" name=""/>
+        <p:cNvGrpSpPr/>
+        <p:nvPr/>
+      </p:nvGrpSpPr>
+      <p:grpSpPr>
+        <a:xfrm>
+          <a:off x="0" y="0"/>
+          <a:ext cx="0" cy="0"/>
+          <a:chOff x="0" y="0"/>
+          <a:chExt cx="0" cy="0"/>
+        </a:xfrm>
+      </p:grpSpPr>
+      <p:sp>
+        <p:nvSpPr>
+          <p:cNvPr id="2" name="Slide Image Placeholder 1"/>
+          <p:cNvSpPr>
+            <a:spLocks noGrp="1"/>
+          </p:cNvSpPr>
+          <p:nvPr>
+            <p:ph type="sldImg" idx="2"/>
+          </p:nvPr>
+        </p:nvSpPr>
+        <p:spPr/>
+      </p:sp>
+      <p:sp>
+        <p:nvSpPr>
+          <p:cNvPr id="3" name="Notes Placeholder 2"/>
+          <p:cNvSpPr>
+            <a:spLocks noGrp="1"/>
+          </p:cNvSpPr>
+          <p:nvPr>
+            <p:ph type="body" idx="3" sz="quarter"/>
+          </p:nvPr>
+        </p:nvSpPr>
+        <p:spPr/>
+        <p:txBody>
+          <a:bodyPr/>
+          <a:lstStyle/>
+          <a:p>
+            <a:r>
+              <a:t>2:20–2:45 — Definir o valor da assinatura antes do pitch.</a:t>
+            </a:r>
+          </a:p>
+        </p:txBody>
+      </p:sp>
+      <p:sp>
+        <p:nvSpPr>
+          <p:cNvPr id="4" name="Slide Number Placeholder 3"/>
+          <p:cNvSpPr>
+            <a:spLocks noGrp="1"/>
+          </p:cNvSpPr>
+          <p:nvPr>
+            <p:ph type="sldNum" idx="5" sz="quarter"/>
+          </p:nvPr>
+        </p:nvSpPr>
+        <p:spPr/>
+      </p:sp>
+    </p:spTree>
+  </p:cSld>
+  <p:clrMapOvr>
+    <a:masterClrMapping/>
+  </p:clrMapOvr>
+</p:notes>
+</file>
+
+<file path=ppt/notesSlides/notesSlide8.xml><?xml version="1.0" encoding="utf-8"?>
 <p:notes xmlns:a="http://schemas.openxmlformats.org/drawingml/2006/main" xmlns:p="http://schemas.openxmlformats.org/presentationml/2006/main" xmlns:r="http://schemas.openxmlformats.org/officeDocument/2006/relationships">
   <p:cSld>
     <p:spTree>
@@ -8127,7 +8198,7 @@
                 </a:solidFill>
                 <a:latin typeface="Courier New"/>
               </a:rPr>
-              <a:t>QUEM PAGA — E POR QUE NÃO COPIAM</a:t>
+              <a:t>O MERCADO</a:t>
             </a:r>
           </a:p>
         </p:txBody>
@@ -8141,7 +8212,7 @@
         <p:spPr>
           <a:xfrm>
             <a:off x="685800" y="960120"/>
-            <a:ext cx="9601200" cy="731520"/>
+            <a:ext cx="10820095" cy="1463040"/>
           </a:xfrm>
           <a:prstGeom prst="rect">
             <a:avLst/>
@@ -8154,109 +8225,55 @@
           </a:bodyPr>
           <a:lstStyle/>
           <a:p>
-            <a:pPr algn="l"/>
-            <a:r>
-              <a:rPr sz="3000" b="1">
-                <a:solidFill>
-                  <a:srgbClr val="F3EFE5"/>
-                </a:solidFill>
-                <a:latin typeface="Arial"/>
-              </a:rPr>
-              <a:t>O contrato é com a rede, não com a loja.</a:t>
-            </a:r>
-          </a:p>
-        </p:txBody>
-      </p:sp>
-      <p:sp>
-        <p:nvSpPr>
-          <p:cNvPr id="5" name="TextBox 4"/>
-          <p:cNvSpPr txBox="1"/>
-          <p:nvPr/>
-        </p:nvSpPr>
-        <p:spPr>
-          <a:xfrm>
-            <a:off x="685800" y="1874519"/>
-            <a:ext cx="2377440" cy="292608"/>
-          </a:xfrm>
-          <a:prstGeom prst="rect">
-            <a:avLst/>
-          </a:prstGeom>
-          <a:noFill/>
-        </p:spPr>
-        <p:txBody>
-          <a:bodyPr wrap="square" anchor="t" lIns="0" rIns="0" tIns="0" bIns="0">
-            <a:spAutoFit/>
-          </a:bodyPr>
-          <a:lstStyle/>
-          <a:p>
-            <a:pPr algn="l"/>
-            <a:r>
-              <a:rPr sz="900" b="0" spc="120">
-                <a:solidFill>
-                  <a:srgbClr val="8A8A86"/>
-                </a:solidFill>
-                <a:latin typeface="Courier New"/>
-              </a:rPr>
-              <a:t>CLIENTE</a:t>
-            </a:r>
-          </a:p>
-        </p:txBody>
-      </p:sp>
-      <p:sp>
-        <p:nvSpPr>
-          <p:cNvPr id="6" name="TextBox 5"/>
-          <p:cNvSpPr txBox="1"/>
-          <p:nvPr/>
-        </p:nvSpPr>
-        <p:spPr>
-          <a:xfrm>
-            <a:off x="3246120" y="1837943"/>
-            <a:ext cx="8259775" cy="658368"/>
-          </a:xfrm>
-          <a:prstGeom prst="rect">
-            <a:avLst/>
-          </a:prstGeom>
-          <a:noFill/>
-        </p:spPr>
-        <p:txBody>
-          <a:bodyPr wrap="square" anchor="t" lIns="0" rIns="0" tIns="0" bIns="0">
-            <a:spAutoFit/>
-          </a:bodyPr>
-          <a:lstStyle/>
-          <a:p>
             <a:pPr algn="l">
               <a:lnSpc>
-                <a:spcPct val="128000"/>
+                <a:spcPct val="105000"/>
               </a:lnSpc>
             </a:pPr>
             <a:r>
-              <a:rPr sz="1250" b="0">
+              <a:rPr sz="3000" b="1">
                 <a:solidFill>
                   <a:srgbClr val="F3EFE5"/>
                 </a:solidFill>
                 <a:latin typeface="Arial"/>
               </a:rPr>
-              <a:t>Rede e franquia de varejo local. Vende uma vez, atende N unidades.</a:t>
-            </a:r>
-          </a:p>
-        </p:txBody>
-      </p:sp>
-      <p:sp>
-        <p:nvSpPr>
-          <p:cNvPr id="7" name="Rectangle 6"/>
+              <a:t>Ninguém precisa ser convencido a gastar.</a:t>
+            </a:r>
+          </a:p>
+          <a:p>
+            <a:pPr algn="l">
+              <a:lnSpc>
+                <a:spcPct val="105000"/>
+              </a:lnSpc>
+            </a:pPr>
+            <a:r>
+              <a:rPr sz="3000" b="1">
+                <a:solidFill>
+                  <a:srgbClr val="FFD400"/>
+                </a:solidFill>
+                <a:latin typeface="Arial"/>
+              </a:rPr>
+              <a:t>Já gastam R$ 42,7 bilhões.</a:t>
+            </a:r>
+          </a:p>
+        </p:txBody>
+      </p:sp>
+      <p:sp>
+        <p:nvSpPr>
+          <p:cNvPr id="5" name="Rectangle 4"/>
           <p:cNvSpPr/>
           <p:nvPr/>
         </p:nvSpPr>
         <p:spPr>
           <a:xfrm>
-            <a:off x="685800" y="2404872"/>
-            <a:ext cx="10820095" cy="10972"/>
+            <a:off x="685800" y="2880360"/>
+            <a:ext cx="2567863" cy="1417320"/>
           </a:xfrm>
           <a:prstGeom prst="rect">
             <a:avLst/>
           </a:prstGeom>
           <a:solidFill>
-            <a:srgbClr val="2A2A28"/>
+            <a:srgbClr val="161616"/>
           </a:solidFill>
           <a:ln>
             <a:noFill/>
@@ -8287,14 +8304,14 @@
       </p:sp>
       <p:sp>
         <p:nvSpPr>
-          <p:cNvPr id="8" name="TextBox 7"/>
+          <p:cNvPr id="6" name="TextBox 5"/>
           <p:cNvSpPr txBox="1"/>
           <p:nvPr/>
         </p:nvSpPr>
         <p:spPr>
           <a:xfrm>
-            <a:off x="685800" y="2624327"/>
-            <a:ext cx="2377440" cy="292608"/>
+            <a:off x="886968" y="3127248"/>
+            <a:ext cx="2165527" cy="640080"/>
           </a:xfrm>
           <a:prstGeom prst="rect">
             <a:avLst/>
@@ -8309,27 +8326,27 @@
           <a:p>
             <a:pPr algn="l"/>
             <a:r>
-              <a:rPr sz="900" b="0" spc="120">
-                <a:solidFill>
-                  <a:srgbClr val="8A8A86"/>
-                </a:solidFill>
-                <a:latin typeface="Courier New"/>
-              </a:rPr>
-              <a:t>TAMANHO</a:t>
-            </a:r>
-          </a:p>
-        </p:txBody>
-      </p:sp>
-      <p:sp>
-        <p:nvSpPr>
-          <p:cNvPr id="9" name="TextBox 8"/>
+              <a:rPr sz="2600" b="1">
+                <a:solidFill>
+                  <a:srgbClr val="FFD400"/>
+                </a:solidFill>
+                <a:latin typeface="Arial"/>
+              </a:rPr>
+              <a:t>R$ 42,7 bi</a:t>
+            </a:r>
+          </a:p>
+        </p:txBody>
+      </p:sp>
+      <p:sp>
+        <p:nvSpPr>
+          <p:cNvPr id="7" name="TextBox 6"/>
           <p:cNvSpPr txBox="1"/>
           <p:nvPr/>
         </p:nvSpPr>
         <p:spPr>
           <a:xfrm>
-            <a:off x="3246120" y="2587751"/>
-            <a:ext cx="8259775" cy="658368"/>
+            <a:off x="886968" y="3794760"/>
+            <a:ext cx="2165527" cy="411480"/>
           </a:xfrm>
           <a:prstGeom prst="rect">
             <a:avLst/>
@@ -8342,39 +8359,35 @@
           </a:bodyPr>
           <a:lstStyle/>
           <a:p>
-            <a:pPr algn="l">
-              <a:lnSpc>
-                <a:spcPct val="128000"/>
-              </a:lnSpc>
-            </a:pPr>
-            <a:r>
-              <a:rPr sz="1250" b="0">
-                <a:solidFill>
-                  <a:srgbClr val="F3EFE5"/>
-                </a:solidFill>
-                <a:latin typeface="Arial"/>
-              </a:rPr>
-              <a:t>Só o iFood tem 500 mil estabelecimentos em 1.500 cidades. É o piso.</a:t>
-            </a:r>
-          </a:p>
-        </p:txBody>
-      </p:sp>
-      <p:sp>
-        <p:nvSpPr>
-          <p:cNvPr id="10" name="Rectangle 9"/>
+            <a:pPr algn="l"/>
+            <a:r>
+              <a:rPr sz="800" b="0" spc="120">
+                <a:solidFill>
+                  <a:srgbClr val="8A8A86"/>
+                </a:solidFill>
+                <a:latin typeface="Courier New"/>
+              </a:rPr>
+              <a:t>MÍDIA DIGITAL NO BRASIL, 2025</a:t>
+            </a:r>
+          </a:p>
+        </p:txBody>
+      </p:sp>
+      <p:sp>
+        <p:nvSpPr>
+          <p:cNvPr id="8" name="Rectangle 7"/>
           <p:cNvSpPr/>
           <p:nvPr/>
         </p:nvSpPr>
         <p:spPr>
           <a:xfrm>
-            <a:off x="685800" y="3154679"/>
-            <a:ext cx="10820095" cy="10972"/>
+            <a:off x="3436543" y="2880360"/>
+            <a:ext cx="2567863" cy="1417320"/>
           </a:xfrm>
           <a:prstGeom prst="rect">
             <a:avLst/>
           </a:prstGeom>
           <a:solidFill>
-            <a:srgbClr val="2A2A28"/>
+            <a:srgbClr val="161616"/>
           </a:solidFill>
           <a:ln>
             <a:noFill/>
@@ -8405,14 +8418,14 @@
       </p:sp>
       <p:sp>
         <p:nvSpPr>
-          <p:cNvPr id="11" name="TextBox 10"/>
+          <p:cNvPr id="9" name="TextBox 8"/>
           <p:cNvSpPr txBox="1"/>
           <p:nvPr/>
         </p:nvSpPr>
         <p:spPr>
           <a:xfrm>
-            <a:off x="685800" y="3374135"/>
-            <a:ext cx="2377440" cy="292608"/>
+            <a:off x="3637711" y="3127248"/>
+            <a:ext cx="2165527" cy="640080"/>
           </a:xfrm>
           <a:prstGeom prst="rect">
             <a:avLst/>
@@ -8427,27 +8440,27 @@
           <a:p>
             <a:pPr algn="l"/>
             <a:r>
-              <a:rPr sz="900" b="0" spc="120">
-                <a:solidFill>
-                  <a:srgbClr val="8A8A86"/>
-                </a:solidFill>
-                <a:latin typeface="Courier New"/>
-              </a:rPr>
-              <a:t>ALTERNATIVA HOJE</a:t>
-            </a:r>
-          </a:p>
-        </p:txBody>
-      </p:sp>
-      <p:sp>
-        <p:nvSpPr>
-          <p:cNvPr id="12" name="TextBox 11"/>
+              <a:rPr sz="2600" b="1">
+                <a:solidFill>
+                  <a:srgbClr val="F3EFE5"/>
+                </a:solidFill>
+                <a:latin typeface="Arial"/>
+              </a:rPr>
+              <a:t>+12,7%</a:t>
+            </a:r>
+          </a:p>
+        </p:txBody>
+      </p:sp>
+      <p:sp>
+        <p:nvSpPr>
+          <p:cNvPr id="10" name="TextBox 9"/>
           <p:cNvSpPr txBox="1"/>
           <p:nvPr/>
         </p:nvSpPr>
         <p:spPr>
           <a:xfrm>
-            <a:off x="3246120" y="3337559"/>
-            <a:ext cx="8259775" cy="658368"/>
+            <a:off x="3637711" y="3794760"/>
+            <a:ext cx="2165527" cy="411480"/>
           </a:xfrm>
           <a:prstGeom prst="rect">
             <a:avLst/>
@@ -8460,39 +8473,35 @@
           </a:bodyPr>
           <a:lstStyle/>
           <a:p>
-            <a:pPr algn="l">
-              <a:lnSpc>
-                <a:spcPct val="128000"/>
-              </a:lnSpc>
-            </a:pPr>
-            <a:r>
-              <a:rPr sz="1250" b="0">
-                <a:solidFill>
-                  <a:srgbClr val="F3EFE5"/>
-                </a:solidFill>
-                <a:latin typeface="Arial"/>
-              </a:rPr>
-              <a:t>Quatro fornecedores — pesquisa, redator, produtora, tráfego. Ou uma planilha vendida no YouTube.</a:t>
-            </a:r>
-          </a:p>
-        </p:txBody>
-      </p:sp>
-      <p:sp>
-        <p:nvSpPr>
-          <p:cNvPr id="13" name="Rectangle 12"/>
+            <a:pPr algn="l"/>
+            <a:r>
+              <a:rPr sz="800" b="0" spc="120">
+                <a:solidFill>
+                  <a:srgbClr val="8A8A86"/>
+                </a:solidFill>
+                <a:latin typeface="Courier New"/>
+              </a:rPr>
+              <a:t>CRESCIMENTO NO ANO</a:t>
+            </a:r>
+          </a:p>
+        </p:txBody>
+      </p:sp>
+      <p:sp>
+        <p:nvSpPr>
+          <p:cNvPr id="11" name="Rectangle 10"/>
           <p:cNvSpPr/>
           <p:nvPr/>
         </p:nvSpPr>
         <p:spPr>
           <a:xfrm>
-            <a:off x="685800" y="3904487"/>
-            <a:ext cx="10820095" cy="10972"/>
+            <a:off x="6187287" y="2880360"/>
+            <a:ext cx="2567863" cy="1417320"/>
           </a:xfrm>
           <a:prstGeom prst="rect">
             <a:avLst/>
           </a:prstGeom>
           <a:solidFill>
-            <a:srgbClr val="2A2A28"/>
+            <a:srgbClr val="161616"/>
           </a:solidFill>
           <a:ln>
             <a:noFill/>
@@ -8523,14 +8532,14 @@
       </p:sp>
       <p:sp>
         <p:nvSpPr>
-          <p:cNvPr id="14" name="TextBox 13"/>
+          <p:cNvPr id="12" name="TextBox 11"/>
           <p:cNvSpPr txBox="1"/>
           <p:nvPr/>
         </p:nvSpPr>
         <p:spPr>
           <a:xfrm>
-            <a:off x="685800" y="4123944"/>
-            <a:ext cx="2377440" cy="292608"/>
+            <a:off x="6388455" y="3127248"/>
+            <a:ext cx="2165527" cy="640080"/>
           </a:xfrm>
           <a:prstGeom prst="rect">
             <a:avLst/>
@@ -8545,27 +8554,27 @@
           <a:p>
             <a:pPr algn="l"/>
             <a:r>
-              <a:rPr sz="900" b="0" spc="120">
-                <a:solidFill>
-                  <a:srgbClr val="8A8A86"/>
-                </a:solidFill>
-                <a:latin typeface="Courier New"/>
-              </a:rPr>
-              <a:t>MODELO</a:t>
-            </a:r>
-          </a:p>
-        </p:txBody>
-      </p:sp>
-      <p:sp>
-        <p:nvSpPr>
-          <p:cNvPr id="15" name="TextBox 14"/>
+              <a:rPr sz="2600" b="1">
+                <a:solidFill>
+                  <a:srgbClr val="F3EFE5"/>
+                </a:solidFill>
+                <a:latin typeface="Arial"/>
+              </a:rPr>
+              <a:t>81%</a:t>
+            </a:r>
+          </a:p>
+        </p:txBody>
+      </p:sp>
+      <p:sp>
+        <p:nvSpPr>
+          <p:cNvPr id="13" name="TextBox 12"/>
           <p:cNvSpPr txBox="1"/>
           <p:nvPr/>
         </p:nvSpPr>
         <p:spPr>
           <a:xfrm>
-            <a:off x="3246120" y="4087368"/>
-            <a:ext cx="8259775" cy="658368"/>
+            <a:off x="6388455" y="3794760"/>
+            <a:ext cx="2165527" cy="411480"/>
           </a:xfrm>
           <a:prstGeom prst="rect">
             <a:avLst/>
@@ -8578,39 +8587,35 @@
           </a:bodyPr>
           <a:lstStyle/>
           <a:p>
-            <a:pPr algn="l">
-              <a:lnSpc>
-                <a:spcPct val="128000"/>
-              </a:lnSpc>
-            </a:pPr>
-            <a:r>
-              <a:rPr sz="1250" b="0">
-                <a:solidFill>
-                  <a:srgbClr val="F3EFE5"/>
-                </a:solidFill>
-                <a:latin typeface="Arial"/>
-              </a:rPr>
-              <a:t>Assinatura por unidade/mês.</a:t>
-            </a:r>
-          </a:p>
-        </p:txBody>
-      </p:sp>
-      <p:sp>
-        <p:nvSpPr>
-          <p:cNvPr id="16" name="Rectangle 15"/>
+            <a:pPr algn="l"/>
+            <a:r>
+              <a:rPr sz="800" b="0" spc="120">
+                <a:solidFill>
+                  <a:srgbClr val="8A8A86"/>
+                </a:solidFill>
+                <a:latin typeface="Courier New"/>
+              </a:rPr>
+              <a:t>EM REDES SOCIAIS E BUSCA</a:t>
+            </a:r>
+          </a:p>
+        </p:txBody>
+      </p:sp>
+      <p:sp>
+        <p:nvSpPr>
+          <p:cNvPr id="14" name="Rectangle 13"/>
           <p:cNvSpPr/>
           <p:nvPr/>
         </p:nvSpPr>
         <p:spPr>
           <a:xfrm>
-            <a:off x="685800" y="4654296"/>
-            <a:ext cx="10820095" cy="10972"/>
+            <a:off x="8938031" y="2880360"/>
+            <a:ext cx="2567863" cy="1417320"/>
           </a:xfrm>
           <a:prstGeom prst="rect">
             <a:avLst/>
           </a:prstGeom>
           <a:solidFill>
-            <a:srgbClr val="2A2A28"/>
+            <a:srgbClr val="161616"/>
           </a:solidFill>
           <a:ln>
             <a:noFill/>
@@ -8641,14 +8646,84 @@
       </p:sp>
       <p:sp>
         <p:nvSpPr>
+          <p:cNvPr id="15" name="TextBox 14"/>
+          <p:cNvSpPr txBox="1"/>
+          <p:nvPr/>
+        </p:nvSpPr>
+        <p:spPr>
+          <a:xfrm>
+            <a:off x="9139199" y="3127248"/>
+            <a:ext cx="2165527" cy="640080"/>
+          </a:xfrm>
+          <a:prstGeom prst="rect">
+            <a:avLst/>
+          </a:prstGeom>
+          <a:noFill/>
+        </p:spPr>
+        <p:txBody>
+          <a:bodyPr wrap="square" anchor="t" lIns="0" rIns="0" tIns="0" bIns="0">
+            <a:spAutoFit/>
+          </a:bodyPr>
+          <a:lstStyle/>
+          <a:p>
+            <a:pPr algn="l"/>
+            <a:r>
+              <a:rPr sz="2600" b="1">
+                <a:solidFill>
+                  <a:srgbClr val="F3EFE5"/>
+                </a:solidFill>
+                <a:latin typeface="Arial"/>
+              </a:rPr>
+              <a:t>204.908</a:t>
+            </a:r>
+          </a:p>
+        </p:txBody>
+      </p:sp>
+      <p:sp>
+        <p:nvSpPr>
+          <p:cNvPr id="16" name="TextBox 15"/>
+          <p:cNvSpPr txBox="1"/>
+          <p:nvPr/>
+        </p:nvSpPr>
+        <p:spPr>
+          <a:xfrm>
+            <a:off x="9139199" y="3794760"/>
+            <a:ext cx="2165527" cy="411480"/>
+          </a:xfrm>
+          <a:prstGeom prst="rect">
+            <a:avLst/>
+          </a:prstGeom>
+          <a:noFill/>
+        </p:spPr>
+        <p:txBody>
+          <a:bodyPr wrap="square" anchor="t" lIns="0" rIns="0" tIns="0" bIns="0">
+            <a:spAutoFit/>
+          </a:bodyPr>
+          <a:lstStyle/>
+          <a:p>
+            <a:pPr algn="l"/>
+            <a:r>
+              <a:rPr sz="800" b="0" spc="120">
+                <a:solidFill>
+                  <a:srgbClr val="8A8A86"/>
+                </a:solidFill>
+                <a:latin typeface="Courier New"/>
+              </a:rPr>
+              <a:t>UNIDADES FRANQUEADAS NO PAÍS</a:t>
+            </a:r>
+          </a:p>
+        </p:txBody>
+      </p:sp>
+      <p:sp>
+        <p:nvSpPr>
           <p:cNvPr id="17" name="TextBox 16"/>
           <p:cNvSpPr txBox="1"/>
           <p:nvPr/>
         </p:nvSpPr>
         <p:spPr>
           <a:xfrm>
-            <a:off x="685800" y="4873752"/>
-            <a:ext cx="2377440" cy="292608"/>
+            <a:off x="685800" y="4572000"/>
+            <a:ext cx="10820095" cy="914400"/>
           </a:xfrm>
           <a:prstGeom prst="rect">
             <a:avLst/>
@@ -8661,15 +8736,28 @@
           </a:bodyPr>
           <a:lstStyle/>
           <a:p>
-            <a:pPr algn="l"/>
-            <a:r>
-              <a:rPr sz="900" b="0" spc="120">
-                <a:solidFill>
-                  <a:srgbClr val="8A8A86"/>
-                </a:solidFill>
-                <a:latin typeface="Courier New"/>
-              </a:rPr>
-              <a:t>CUSTO DE EXECUÇÃO</a:t>
+            <a:pPr algn="l">
+              <a:lnSpc>
+                <a:spcPct val="135000"/>
+              </a:lnSpc>
+            </a:pPr>
+            <a:r>
+              <a:rPr sz="1300" b="0">
+                <a:solidFill>
+                  <a:srgbClr val="A8A49B"/>
+                </a:solidFill>
+                <a:latin typeface="Arial"/>
+              </a:rPr>
+              <a:t>Aqueles 81% caem exatamente onde o agente opera. </a:t>
+            </a:r>
+            <a:r>
+              <a:rPr sz="1300" b="0">
+                <a:solidFill>
+                  <a:srgbClr val="FFD400"/>
+                </a:solidFill>
+                <a:latin typeface="Arial"/>
+              </a:rPr>
+              <a:t>Não precisamos criar mercado — precisamos capturar uma fatia de uma verba que já existe e cresce dois dígitos ao ano.</a:t>
             </a:r>
           </a:p>
         </p:txBody>
@@ -8682,8 +8770,8 @@
         </p:nvSpPr>
         <p:spPr>
           <a:xfrm>
-            <a:off x="3246120" y="4837176"/>
-            <a:ext cx="8259775" cy="658368"/>
+            <a:off x="685800" y="5806440"/>
+            <a:ext cx="10820095" cy="548640"/>
           </a:xfrm>
           <a:prstGeom prst="rect">
             <a:avLst/>
@@ -8698,180 +8786,18 @@
           <a:p>
             <a:pPr algn="l">
               <a:lnSpc>
-                <a:spcPct val="128000"/>
+                <a:spcPct val="150000"/>
               </a:lnSpc>
             </a:pPr>
             <a:r>
-              <a:rPr sz="1250" b="0">
-                <a:solidFill>
-                  <a:srgbClr val="F3EFE5"/>
-                </a:solidFill>
-                <a:latin typeface="Arial"/>
-              </a:rPr>
-              <a:t>Uma análise de mercado completa custou US$ 0,89. Medido, não estimado.</a:t>
-            </a:r>
-          </a:p>
-        </p:txBody>
-      </p:sp>
-      <p:sp>
-        <p:nvSpPr>
-          <p:cNvPr id="19" name="Rectangle 18"/>
-          <p:cNvSpPr/>
-          <p:nvPr/>
-        </p:nvSpPr>
-        <p:spPr>
-          <a:xfrm>
-            <a:off x="685800" y="5404104"/>
-            <a:ext cx="10820095" cy="10972"/>
-          </a:xfrm>
-          <a:prstGeom prst="rect">
-            <a:avLst/>
-          </a:prstGeom>
-          <a:solidFill>
-            <a:srgbClr val="2A2A28"/>
-          </a:solidFill>
-          <a:ln>
-            <a:noFill/>
-          </a:ln>
-          <a:effectLst/>
-        </p:spPr>
-        <p:style>
-          <a:lnRef idx="1">
-            <a:schemeClr val="accent1"/>
-          </a:lnRef>
-          <a:fillRef idx="3">
-            <a:schemeClr val="accent1"/>
-          </a:fillRef>
-          <a:effectRef idx="2">
-            <a:schemeClr val="accent1"/>
-          </a:effectRef>
-          <a:fontRef idx="minor">
-            <a:schemeClr val="lt1"/>
-          </a:fontRef>
-        </p:style>
-        <p:txBody>
-          <a:bodyPr rtlCol="0" anchor="ctr"/>
-          <a:lstStyle/>
-          <a:p>
-            <a:pPr algn="ctr"/>
-          </a:p>
-        </p:txBody>
-      </p:sp>
-      <p:sp>
-        <p:nvSpPr>
-          <p:cNvPr id="20" name="TextBox 19"/>
-          <p:cNvSpPr txBox="1"/>
-          <p:nvPr/>
-        </p:nvSpPr>
-        <p:spPr>
-          <a:xfrm>
-            <a:off x="685800" y="5623560"/>
-            <a:ext cx="2377440" cy="292608"/>
-          </a:xfrm>
-          <a:prstGeom prst="rect">
-            <a:avLst/>
-          </a:prstGeom>
-          <a:noFill/>
-        </p:spPr>
-        <p:txBody>
-          <a:bodyPr wrap="square" anchor="t" lIns="0" rIns="0" tIns="0" bIns="0">
-            <a:spAutoFit/>
-          </a:bodyPr>
-          <a:lstStyle/>
-          <a:p>
-            <a:pPr algn="l"/>
-            <a:r>
-              <a:rPr sz="900" b="0" spc="120">
+              <a:rPr sz="800" b="0">
                 <a:solidFill>
                   <a:srgbClr val="8A8A86"/>
                 </a:solidFill>
                 <a:latin typeface="Courier New"/>
               </a:rPr>
-              <a:t>DEFENSIBILIDADE</a:t>
-            </a:r>
-          </a:p>
-        </p:txBody>
-      </p:sp>
-      <p:sp>
-        <p:nvSpPr>
-          <p:cNvPr id="21" name="TextBox 20"/>
-          <p:cNvSpPr txBox="1"/>
-          <p:nvPr/>
-        </p:nvSpPr>
-        <p:spPr>
-          <a:xfrm>
-            <a:off x="3246120" y="5586984"/>
-            <a:ext cx="8259775" cy="658368"/>
-          </a:xfrm>
-          <a:prstGeom prst="rect">
-            <a:avLst/>
-          </a:prstGeom>
-          <a:noFill/>
-        </p:spPr>
-        <p:txBody>
-          <a:bodyPr wrap="square" anchor="t" lIns="0" rIns="0" tIns="0" bIns="0">
-            <a:spAutoFit/>
-          </a:bodyPr>
-          <a:lstStyle/>
-          <a:p>
-            <a:pPr algn="l">
-              <a:lnSpc>
-                <a:spcPct val="128000"/>
-              </a:lnSpc>
-            </a:pPr>
-            <a:r>
-              <a:rPr sz="1250" b="0">
-                <a:solidFill>
-                  <a:srgbClr val="F3EFE5"/>
-                </a:solidFill>
-                <a:latin typeface="Arial"/>
-              </a:rPr>
-              <a:t>Cada campanha devolve o que converteu, para quem e com qual mecanismo. Copia-se o prompt numa tarde; não se copia o histórico.</a:t>
-            </a:r>
-          </a:p>
-        </p:txBody>
-      </p:sp>
-      <p:sp>
-        <p:nvSpPr>
-          <p:cNvPr id="22" name="Rectangle 21"/>
-          <p:cNvSpPr/>
-          <p:nvPr/>
-        </p:nvSpPr>
-        <p:spPr>
-          <a:xfrm>
-            <a:off x="685800" y="6153912"/>
-            <a:ext cx="10820095" cy="10972"/>
-          </a:xfrm>
-          <a:prstGeom prst="rect">
-            <a:avLst/>
-          </a:prstGeom>
-          <a:solidFill>
-            <a:srgbClr val="2A2A28"/>
-          </a:solidFill>
-          <a:ln>
-            <a:noFill/>
-          </a:ln>
-          <a:effectLst/>
-        </p:spPr>
-        <p:style>
-          <a:lnRef idx="1">
-            <a:schemeClr val="accent1"/>
-          </a:lnRef>
-          <a:fillRef idx="3">
-            <a:schemeClr val="accent1"/>
-          </a:fillRef>
-          <a:effectRef idx="2">
-            <a:schemeClr val="accent1"/>
-          </a:effectRef>
-          <a:fontRef idx="minor">
-            <a:schemeClr val="lt1"/>
-          </a:fontRef>
-        </p:style>
-        <p:txBody>
-          <a:bodyPr rtlCol="0" anchor="ctr"/>
-          <a:lstStyle/>
-          <a:p>
-            <a:pPr algn="ctr"/>
+              <a:t>FONTES: IAB BRASIL + IBOPE, DIGITAL ADSPEND 2026 · ABF, MARÇO DE 2026 · ABRASEL: R$ 495 BI EM ALIMENTAÇÃO FORA DO LAR</a:t>
+            </a:r>
           </a:p>
         </p:txBody>
       </p:sp>
@@ -8884,6 +8810,846 @@
 </file>
 
 <file path=ppt/slides/slide7.xml><?xml version="1.0" encoding="utf-8"?>
+<p:sld xmlns:a="http://schemas.openxmlformats.org/drawingml/2006/main" xmlns:p="http://schemas.openxmlformats.org/presentationml/2006/main" xmlns:r="http://schemas.openxmlformats.org/officeDocument/2006/relationships">
+  <p:cSld>
+    <p:spTree>
+      <p:nvGrpSpPr>
+        <p:cNvPr id="1" name=""/>
+        <p:cNvGrpSpPr/>
+        <p:nvPr/>
+      </p:nvGrpSpPr>
+      <p:grpSpPr/>
+      <p:sp>
+        <p:nvSpPr>
+          <p:cNvPr id="2" name="Rectangle 1"/>
+          <p:cNvSpPr/>
+          <p:nvPr/>
+        </p:nvSpPr>
+        <p:spPr>
+          <a:xfrm>
+            <a:off x="0" y="0"/>
+            <a:ext cx="12191695" cy="6858000"/>
+          </a:xfrm>
+          <a:prstGeom prst="rect">
+            <a:avLst/>
+          </a:prstGeom>
+          <a:solidFill>
+            <a:srgbClr val="0A0A0A"/>
+          </a:solidFill>
+          <a:ln>
+            <a:noFill/>
+          </a:ln>
+          <a:effectLst/>
+        </p:spPr>
+        <p:style>
+          <a:lnRef idx="1">
+            <a:schemeClr val="accent1"/>
+          </a:lnRef>
+          <a:fillRef idx="3">
+            <a:schemeClr val="accent1"/>
+          </a:fillRef>
+          <a:effectRef idx="2">
+            <a:schemeClr val="accent1"/>
+          </a:effectRef>
+          <a:fontRef idx="minor">
+            <a:schemeClr val="lt1"/>
+          </a:fontRef>
+        </p:style>
+        <p:txBody>
+          <a:bodyPr rtlCol="0" anchor="ctr"/>
+          <a:lstStyle/>
+          <a:p>
+            <a:pPr algn="ctr"/>
+          </a:p>
+        </p:txBody>
+      </p:sp>
+      <p:sp>
+        <p:nvSpPr>
+          <p:cNvPr id="3" name="TextBox 2"/>
+          <p:cNvSpPr txBox="1"/>
+          <p:nvPr/>
+        </p:nvSpPr>
+        <p:spPr>
+          <a:xfrm>
+            <a:off x="685800" y="548640"/>
+            <a:ext cx="7315200" cy="228600"/>
+          </a:xfrm>
+          <a:prstGeom prst="rect">
+            <a:avLst/>
+          </a:prstGeom>
+          <a:noFill/>
+        </p:spPr>
+        <p:txBody>
+          <a:bodyPr wrap="square" anchor="t" lIns="0" rIns="0" tIns="0" bIns="0">
+            <a:spAutoFit/>
+          </a:bodyPr>
+          <a:lstStyle/>
+          <a:p>
+            <a:pPr algn="l"/>
+            <a:r>
+              <a:rPr sz="900" b="0" spc="120">
+                <a:solidFill>
+                  <a:srgbClr val="8A8A86"/>
+                </a:solidFill>
+                <a:latin typeface="Courier New"/>
+              </a:rPr>
+              <a:t>QUEM PAGA — E POR QUE NÃO COPIAM</a:t>
+            </a:r>
+          </a:p>
+        </p:txBody>
+      </p:sp>
+      <p:sp>
+        <p:nvSpPr>
+          <p:cNvPr id="4" name="TextBox 3"/>
+          <p:cNvSpPr txBox="1"/>
+          <p:nvPr/>
+        </p:nvSpPr>
+        <p:spPr>
+          <a:xfrm>
+            <a:off x="685800" y="960120"/>
+            <a:ext cx="9601200" cy="731520"/>
+          </a:xfrm>
+          <a:prstGeom prst="rect">
+            <a:avLst/>
+          </a:prstGeom>
+          <a:noFill/>
+        </p:spPr>
+        <p:txBody>
+          <a:bodyPr wrap="square" anchor="t" lIns="0" rIns="0" tIns="0" bIns="0">
+            <a:spAutoFit/>
+          </a:bodyPr>
+          <a:lstStyle/>
+          <a:p>
+            <a:pPr algn="l"/>
+            <a:r>
+              <a:rPr sz="3000" b="1">
+                <a:solidFill>
+                  <a:srgbClr val="F3EFE5"/>
+                </a:solidFill>
+                <a:latin typeface="Arial"/>
+              </a:rPr>
+              <a:t>O contrato é com a rede, não com a loja.</a:t>
+            </a:r>
+          </a:p>
+        </p:txBody>
+      </p:sp>
+      <p:sp>
+        <p:nvSpPr>
+          <p:cNvPr id="5" name="TextBox 4"/>
+          <p:cNvSpPr txBox="1"/>
+          <p:nvPr/>
+        </p:nvSpPr>
+        <p:spPr>
+          <a:xfrm>
+            <a:off x="685800" y="1874519"/>
+            <a:ext cx="2377440" cy="292608"/>
+          </a:xfrm>
+          <a:prstGeom prst="rect">
+            <a:avLst/>
+          </a:prstGeom>
+          <a:noFill/>
+        </p:spPr>
+        <p:txBody>
+          <a:bodyPr wrap="square" anchor="t" lIns="0" rIns="0" tIns="0" bIns="0">
+            <a:spAutoFit/>
+          </a:bodyPr>
+          <a:lstStyle/>
+          <a:p>
+            <a:pPr algn="l"/>
+            <a:r>
+              <a:rPr sz="900" b="0" spc="120">
+                <a:solidFill>
+                  <a:srgbClr val="8A8A86"/>
+                </a:solidFill>
+                <a:latin typeface="Courier New"/>
+              </a:rPr>
+              <a:t>CLIENTE</a:t>
+            </a:r>
+          </a:p>
+        </p:txBody>
+      </p:sp>
+      <p:sp>
+        <p:nvSpPr>
+          <p:cNvPr id="6" name="TextBox 5"/>
+          <p:cNvSpPr txBox="1"/>
+          <p:nvPr/>
+        </p:nvSpPr>
+        <p:spPr>
+          <a:xfrm>
+            <a:off x="3246120" y="1837943"/>
+            <a:ext cx="8259775" cy="658368"/>
+          </a:xfrm>
+          <a:prstGeom prst="rect">
+            <a:avLst/>
+          </a:prstGeom>
+          <a:noFill/>
+        </p:spPr>
+        <p:txBody>
+          <a:bodyPr wrap="square" anchor="t" lIns="0" rIns="0" tIns="0" bIns="0">
+            <a:spAutoFit/>
+          </a:bodyPr>
+          <a:lstStyle/>
+          <a:p>
+            <a:pPr algn="l">
+              <a:lnSpc>
+                <a:spcPct val="128000"/>
+              </a:lnSpc>
+            </a:pPr>
+            <a:r>
+              <a:rPr sz="1250" b="0">
+                <a:solidFill>
+                  <a:srgbClr val="F3EFE5"/>
+                </a:solidFill>
+                <a:latin typeface="Arial"/>
+              </a:rPr>
+              <a:t>Rede e franquia de varejo local. Vende uma vez, atende N unidades.</a:t>
+            </a:r>
+          </a:p>
+        </p:txBody>
+      </p:sp>
+      <p:sp>
+        <p:nvSpPr>
+          <p:cNvPr id="7" name="Rectangle 6"/>
+          <p:cNvSpPr/>
+          <p:nvPr/>
+        </p:nvSpPr>
+        <p:spPr>
+          <a:xfrm>
+            <a:off x="685800" y="2404872"/>
+            <a:ext cx="10820095" cy="10972"/>
+          </a:xfrm>
+          <a:prstGeom prst="rect">
+            <a:avLst/>
+          </a:prstGeom>
+          <a:solidFill>
+            <a:srgbClr val="2A2A28"/>
+          </a:solidFill>
+          <a:ln>
+            <a:noFill/>
+          </a:ln>
+          <a:effectLst/>
+        </p:spPr>
+        <p:style>
+          <a:lnRef idx="1">
+            <a:schemeClr val="accent1"/>
+          </a:lnRef>
+          <a:fillRef idx="3">
+            <a:schemeClr val="accent1"/>
+          </a:fillRef>
+          <a:effectRef idx="2">
+            <a:schemeClr val="accent1"/>
+          </a:effectRef>
+          <a:fontRef idx="minor">
+            <a:schemeClr val="lt1"/>
+          </a:fontRef>
+        </p:style>
+        <p:txBody>
+          <a:bodyPr rtlCol="0" anchor="ctr"/>
+          <a:lstStyle/>
+          <a:p>
+            <a:pPr algn="ctr"/>
+          </a:p>
+        </p:txBody>
+      </p:sp>
+      <p:sp>
+        <p:nvSpPr>
+          <p:cNvPr id="8" name="TextBox 7"/>
+          <p:cNvSpPr txBox="1"/>
+          <p:nvPr/>
+        </p:nvSpPr>
+        <p:spPr>
+          <a:xfrm>
+            <a:off x="685800" y="2624327"/>
+            <a:ext cx="2377440" cy="292608"/>
+          </a:xfrm>
+          <a:prstGeom prst="rect">
+            <a:avLst/>
+          </a:prstGeom>
+          <a:noFill/>
+        </p:spPr>
+        <p:txBody>
+          <a:bodyPr wrap="square" anchor="t" lIns="0" rIns="0" tIns="0" bIns="0">
+            <a:spAutoFit/>
+          </a:bodyPr>
+          <a:lstStyle/>
+          <a:p>
+            <a:pPr algn="l"/>
+            <a:r>
+              <a:rPr sz="900" b="0" spc="120">
+                <a:solidFill>
+                  <a:srgbClr val="8A8A86"/>
+                </a:solidFill>
+                <a:latin typeface="Courier New"/>
+              </a:rPr>
+              <a:t>PORTA DE ENTRADA</a:t>
+            </a:r>
+          </a:p>
+        </p:txBody>
+      </p:sp>
+      <p:sp>
+        <p:nvSpPr>
+          <p:cNvPr id="9" name="TextBox 8"/>
+          <p:cNvSpPr txBox="1"/>
+          <p:nvPr/>
+        </p:nvSpPr>
+        <p:spPr>
+          <a:xfrm>
+            <a:off x="3246120" y="2587751"/>
+            <a:ext cx="8259775" cy="658368"/>
+          </a:xfrm>
+          <a:prstGeom prst="rect">
+            <a:avLst/>
+          </a:prstGeom>
+          <a:noFill/>
+        </p:spPr>
+        <p:txBody>
+          <a:bodyPr wrap="square" anchor="t" lIns="0" rIns="0" tIns="0" bIns="0">
+            <a:spAutoFit/>
+          </a:bodyPr>
+          <a:lstStyle/>
+          <a:p>
+            <a:pPr algn="l">
+              <a:lnSpc>
+                <a:spcPct val="128000"/>
+              </a:lnSpc>
+            </a:pPr>
+            <a:r>
+              <a:rPr sz="1250" b="0">
+                <a:solidFill>
+                  <a:srgbClr val="F3EFE5"/>
+                </a:solidFill>
+                <a:latin typeface="Arial"/>
+              </a:rPr>
+              <a:t>Food-service: R$ 495 bilhões em alimentação fora do lar, e 500 mil estabelecimentos só no iFood.</a:t>
+            </a:r>
+          </a:p>
+        </p:txBody>
+      </p:sp>
+      <p:sp>
+        <p:nvSpPr>
+          <p:cNvPr id="10" name="Rectangle 9"/>
+          <p:cNvSpPr/>
+          <p:nvPr/>
+        </p:nvSpPr>
+        <p:spPr>
+          <a:xfrm>
+            <a:off x="685800" y="3154679"/>
+            <a:ext cx="10820095" cy="10972"/>
+          </a:xfrm>
+          <a:prstGeom prst="rect">
+            <a:avLst/>
+          </a:prstGeom>
+          <a:solidFill>
+            <a:srgbClr val="2A2A28"/>
+          </a:solidFill>
+          <a:ln>
+            <a:noFill/>
+          </a:ln>
+          <a:effectLst/>
+        </p:spPr>
+        <p:style>
+          <a:lnRef idx="1">
+            <a:schemeClr val="accent1"/>
+          </a:lnRef>
+          <a:fillRef idx="3">
+            <a:schemeClr val="accent1"/>
+          </a:fillRef>
+          <a:effectRef idx="2">
+            <a:schemeClr val="accent1"/>
+          </a:effectRef>
+          <a:fontRef idx="minor">
+            <a:schemeClr val="lt1"/>
+          </a:fontRef>
+        </p:style>
+        <p:txBody>
+          <a:bodyPr rtlCol="0" anchor="ctr"/>
+          <a:lstStyle/>
+          <a:p>
+            <a:pPr algn="ctr"/>
+          </a:p>
+        </p:txBody>
+      </p:sp>
+      <p:sp>
+        <p:nvSpPr>
+          <p:cNvPr id="11" name="TextBox 10"/>
+          <p:cNvSpPr txBox="1"/>
+          <p:nvPr/>
+        </p:nvSpPr>
+        <p:spPr>
+          <a:xfrm>
+            <a:off x="685800" y="3374135"/>
+            <a:ext cx="2377440" cy="292608"/>
+          </a:xfrm>
+          <a:prstGeom prst="rect">
+            <a:avLst/>
+          </a:prstGeom>
+          <a:noFill/>
+        </p:spPr>
+        <p:txBody>
+          <a:bodyPr wrap="square" anchor="t" lIns="0" rIns="0" tIns="0" bIns="0">
+            <a:spAutoFit/>
+          </a:bodyPr>
+          <a:lstStyle/>
+          <a:p>
+            <a:pPr algn="l"/>
+            <a:r>
+              <a:rPr sz="900" b="0" spc="120">
+                <a:solidFill>
+                  <a:srgbClr val="8A8A86"/>
+                </a:solidFill>
+                <a:latin typeface="Courier New"/>
+              </a:rPr>
+              <a:t>ALTERNATIVA HOJE</a:t>
+            </a:r>
+          </a:p>
+        </p:txBody>
+      </p:sp>
+      <p:sp>
+        <p:nvSpPr>
+          <p:cNvPr id="12" name="TextBox 11"/>
+          <p:cNvSpPr txBox="1"/>
+          <p:nvPr/>
+        </p:nvSpPr>
+        <p:spPr>
+          <a:xfrm>
+            <a:off x="3246120" y="3337559"/>
+            <a:ext cx="8259775" cy="658368"/>
+          </a:xfrm>
+          <a:prstGeom prst="rect">
+            <a:avLst/>
+          </a:prstGeom>
+          <a:noFill/>
+        </p:spPr>
+        <p:txBody>
+          <a:bodyPr wrap="square" anchor="t" lIns="0" rIns="0" tIns="0" bIns="0">
+            <a:spAutoFit/>
+          </a:bodyPr>
+          <a:lstStyle/>
+          <a:p>
+            <a:pPr algn="l">
+              <a:lnSpc>
+                <a:spcPct val="128000"/>
+              </a:lnSpc>
+            </a:pPr>
+            <a:r>
+              <a:rPr sz="1250" b="0">
+                <a:solidFill>
+                  <a:srgbClr val="F3EFE5"/>
+                </a:solidFill>
+                <a:latin typeface="Arial"/>
+              </a:rPr>
+              <a:t>Quatro fornecedores — pesquisa, redator, produtora, tráfego. Ou uma planilha vendida no YouTube.</a:t>
+            </a:r>
+          </a:p>
+        </p:txBody>
+      </p:sp>
+      <p:sp>
+        <p:nvSpPr>
+          <p:cNvPr id="13" name="Rectangle 12"/>
+          <p:cNvSpPr/>
+          <p:nvPr/>
+        </p:nvSpPr>
+        <p:spPr>
+          <a:xfrm>
+            <a:off x="685800" y="3904487"/>
+            <a:ext cx="10820095" cy="10972"/>
+          </a:xfrm>
+          <a:prstGeom prst="rect">
+            <a:avLst/>
+          </a:prstGeom>
+          <a:solidFill>
+            <a:srgbClr val="2A2A28"/>
+          </a:solidFill>
+          <a:ln>
+            <a:noFill/>
+          </a:ln>
+          <a:effectLst/>
+        </p:spPr>
+        <p:style>
+          <a:lnRef idx="1">
+            <a:schemeClr val="accent1"/>
+          </a:lnRef>
+          <a:fillRef idx="3">
+            <a:schemeClr val="accent1"/>
+          </a:fillRef>
+          <a:effectRef idx="2">
+            <a:schemeClr val="accent1"/>
+          </a:effectRef>
+          <a:fontRef idx="minor">
+            <a:schemeClr val="lt1"/>
+          </a:fontRef>
+        </p:style>
+        <p:txBody>
+          <a:bodyPr rtlCol="0" anchor="ctr"/>
+          <a:lstStyle/>
+          <a:p>
+            <a:pPr algn="ctr"/>
+          </a:p>
+        </p:txBody>
+      </p:sp>
+      <p:sp>
+        <p:nvSpPr>
+          <p:cNvPr id="14" name="TextBox 13"/>
+          <p:cNvSpPr txBox="1"/>
+          <p:nvPr/>
+        </p:nvSpPr>
+        <p:spPr>
+          <a:xfrm>
+            <a:off x="685800" y="4123944"/>
+            <a:ext cx="2377440" cy="292608"/>
+          </a:xfrm>
+          <a:prstGeom prst="rect">
+            <a:avLst/>
+          </a:prstGeom>
+          <a:noFill/>
+        </p:spPr>
+        <p:txBody>
+          <a:bodyPr wrap="square" anchor="t" lIns="0" rIns="0" tIns="0" bIns="0">
+            <a:spAutoFit/>
+          </a:bodyPr>
+          <a:lstStyle/>
+          <a:p>
+            <a:pPr algn="l"/>
+            <a:r>
+              <a:rPr sz="900" b="0" spc="120">
+                <a:solidFill>
+                  <a:srgbClr val="8A8A86"/>
+                </a:solidFill>
+                <a:latin typeface="Courier New"/>
+              </a:rPr>
+              <a:t>MODELO</a:t>
+            </a:r>
+          </a:p>
+        </p:txBody>
+      </p:sp>
+      <p:sp>
+        <p:nvSpPr>
+          <p:cNvPr id="15" name="TextBox 14"/>
+          <p:cNvSpPr txBox="1"/>
+          <p:nvPr/>
+        </p:nvSpPr>
+        <p:spPr>
+          <a:xfrm>
+            <a:off x="3246120" y="4087368"/>
+            <a:ext cx="8259775" cy="658368"/>
+          </a:xfrm>
+          <a:prstGeom prst="rect">
+            <a:avLst/>
+          </a:prstGeom>
+          <a:noFill/>
+        </p:spPr>
+        <p:txBody>
+          <a:bodyPr wrap="square" anchor="t" lIns="0" rIns="0" tIns="0" bIns="0">
+            <a:spAutoFit/>
+          </a:bodyPr>
+          <a:lstStyle/>
+          <a:p>
+            <a:pPr algn="l">
+              <a:lnSpc>
+                <a:spcPct val="128000"/>
+              </a:lnSpc>
+            </a:pPr>
+            <a:r>
+              <a:rPr sz="1250" b="0">
+                <a:solidFill>
+                  <a:srgbClr val="F3EFE5"/>
+                </a:solidFill>
+                <a:latin typeface="Arial"/>
+              </a:rPr>
+              <a:t>Assinatura por unidade/mês.</a:t>
+            </a:r>
+          </a:p>
+        </p:txBody>
+      </p:sp>
+      <p:sp>
+        <p:nvSpPr>
+          <p:cNvPr id="16" name="Rectangle 15"/>
+          <p:cNvSpPr/>
+          <p:nvPr/>
+        </p:nvSpPr>
+        <p:spPr>
+          <a:xfrm>
+            <a:off x="685800" y="4654296"/>
+            <a:ext cx="10820095" cy="10972"/>
+          </a:xfrm>
+          <a:prstGeom prst="rect">
+            <a:avLst/>
+          </a:prstGeom>
+          <a:solidFill>
+            <a:srgbClr val="2A2A28"/>
+          </a:solidFill>
+          <a:ln>
+            <a:noFill/>
+          </a:ln>
+          <a:effectLst/>
+        </p:spPr>
+        <p:style>
+          <a:lnRef idx="1">
+            <a:schemeClr val="accent1"/>
+          </a:lnRef>
+          <a:fillRef idx="3">
+            <a:schemeClr val="accent1"/>
+          </a:fillRef>
+          <a:effectRef idx="2">
+            <a:schemeClr val="accent1"/>
+          </a:effectRef>
+          <a:fontRef idx="minor">
+            <a:schemeClr val="lt1"/>
+          </a:fontRef>
+        </p:style>
+        <p:txBody>
+          <a:bodyPr rtlCol="0" anchor="ctr"/>
+          <a:lstStyle/>
+          <a:p>
+            <a:pPr algn="ctr"/>
+          </a:p>
+        </p:txBody>
+      </p:sp>
+      <p:sp>
+        <p:nvSpPr>
+          <p:cNvPr id="17" name="TextBox 16"/>
+          <p:cNvSpPr txBox="1"/>
+          <p:nvPr/>
+        </p:nvSpPr>
+        <p:spPr>
+          <a:xfrm>
+            <a:off x="685800" y="4873752"/>
+            <a:ext cx="2377440" cy="292608"/>
+          </a:xfrm>
+          <a:prstGeom prst="rect">
+            <a:avLst/>
+          </a:prstGeom>
+          <a:noFill/>
+        </p:spPr>
+        <p:txBody>
+          <a:bodyPr wrap="square" anchor="t" lIns="0" rIns="0" tIns="0" bIns="0">
+            <a:spAutoFit/>
+          </a:bodyPr>
+          <a:lstStyle/>
+          <a:p>
+            <a:pPr algn="l"/>
+            <a:r>
+              <a:rPr sz="900" b="0" spc="120">
+                <a:solidFill>
+                  <a:srgbClr val="8A8A86"/>
+                </a:solidFill>
+                <a:latin typeface="Courier New"/>
+              </a:rPr>
+              <a:t>CUSTO DE EXECUÇÃO</a:t>
+            </a:r>
+          </a:p>
+        </p:txBody>
+      </p:sp>
+      <p:sp>
+        <p:nvSpPr>
+          <p:cNvPr id="18" name="TextBox 17"/>
+          <p:cNvSpPr txBox="1"/>
+          <p:nvPr/>
+        </p:nvSpPr>
+        <p:spPr>
+          <a:xfrm>
+            <a:off x="3246120" y="4837176"/>
+            <a:ext cx="8259775" cy="658368"/>
+          </a:xfrm>
+          <a:prstGeom prst="rect">
+            <a:avLst/>
+          </a:prstGeom>
+          <a:noFill/>
+        </p:spPr>
+        <p:txBody>
+          <a:bodyPr wrap="square" anchor="t" lIns="0" rIns="0" tIns="0" bIns="0">
+            <a:spAutoFit/>
+          </a:bodyPr>
+          <a:lstStyle/>
+          <a:p>
+            <a:pPr algn="l">
+              <a:lnSpc>
+                <a:spcPct val="128000"/>
+              </a:lnSpc>
+            </a:pPr>
+            <a:r>
+              <a:rPr sz="1250" b="0">
+                <a:solidFill>
+                  <a:srgbClr val="F3EFE5"/>
+                </a:solidFill>
+                <a:latin typeface="Arial"/>
+              </a:rPr>
+              <a:t>Uma análise de mercado completa custou US$ 0,89. Medido, não estimado.</a:t>
+            </a:r>
+          </a:p>
+        </p:txBody>
+      </p:sp>
+      <p:sp>
+        <p:nvSpPr>
+          <p:cNvPr id="19" name="Rectangle 18"/>
+          <p:cNvSpPr/>
+          <p:nvPr/>
+        </p:nvSpPr>
+        <p:spPr>
+          <a:xfrm>
+            <a:off x="685800" y="5404104"/>
+            <a:ext cx="10820095" cy="10972"/>
+          </a:xfrm>
+          <a:prstGeom prst="rect">
+            <a:avLst/>
+          </a:prstGeom>
+          <a:solidFill>
+            <a:srgbClr val="2A2A28"/>
+          </a:solidFill>
+          <a:ln>
+            <a:noFill/>
+          </a:ln>
+          <a:effectLst/>
+        </p:spPr>
+        <p:style>
+          <a:lnRef idx="1">
+            <a:schemeClr val="accent1"/>
+          </a:lnRef>
+          <a:fillRef idx="3">
+            <a:schemeClr val="accent1"/>
+          </a:fillRef>
+          <a:effectRef idx="2">
+            <a:schemeClr val="accent1"/>
+          </a:effectRef>
+          <a:fontRef idx="minor">
+            <a:schemeClr val="lt1"/>
+          </a:fontRef>
+        </p:style>
+        <p:txBody>
+          <a:bodyPr rtlCol="0" anchor="ctr"/>
+          <a:lstStyle/>
+          <a:p>
+            <a:pPr algn="ctr"/>
+          </a:p>
+        </p:txBody>
+      </p:sp>
+      <p:sp>
+        <p:nvSpPr>
+          <p:cNvPr id="20" name="TextBox 19"/>
+          <p:cNvSpPr txBox="1"/>
+          <p:nvPr/>
+        </p:nvSpPr>
+        <p:spPr>
+          <a:xfrm>
+            <a:off x="685800" y="5623560"/>
+            <a:ext cx="2377440" cy="292608"/>
+          </a:xfrm>
+          <a:prstGeom prst="rect">
+            <a:avLst/>
+          </a:prstGeom>
+          <a:noFill/>
+        </p:spPr>
+        <p:txBody>
+          <a:bodyPr wrap="square" anchor="t" lIns="0" rIns="0" tIns="0" bIns="0">
+            <a:spAutoFit/>
+          </a:bodyPr>
+          <a:lstStyle/>
+          <a:p>
+            <a:pPr algn="l"/>
+            <a:r>
+              <a:rPr sz="900" b="0" spc="120">
+                <a:solidFill>
+                  <a:srgbClr val="8A8A86"/>
+                </a:solidFill>
+                <a:latin typeface="Courier New"/>
+              </a:rPr>
+              <a:t>DEFENSIBILIDADE</a:t>
+            </a:r>
+          </a:p>
+        </p:txBody>
+      </p:sp>
+      <p:sp>
+        <p:nvSpPr>
+          <p:cNvPr id="21" name="TextBox 20"/>
+          <p:cNvSpPr txBox="1"/>
+          <p:nvPr/>
+        </p:nvSpPr>
+        <p:spPr>
+          <a:xfrm>
+            <a:off x="3246120" y="5586984"/>
+            <a:ext cx="8259775" cy="658368"/>
+          </a:xfrm>
+          <a:prstGeom prst="rect">
+            <a:avLst/>
+          </a:prstGeom>
+          <a:noFill/>
+        </p:spPr>
+        <p:txBody>
+          <a:bodyPr wrap="square" anchor="t" lIns="0" rIns="0" tIns="0" bIns="0">
+            <a:spAutoFit/>
+          </a:bodyPr>
+          <a:lstStyle/>
+          <a:p>
+            <a:pPr algn="l">
+              <a:lnSpc>
+                <a:spcPct val="128000"/>
+              </a:lnSpc>
+            </a:pPr>
+            <a:r>
+              <a:rPr sz="1250" b="0">
+                <a:solidFill>
+                  <a:srgbClr val="F3EFE5"/>
+                </a:solidFill>
+                <a:latin typeface="Arial"/>
+              </a:rPr>
+              <a:t>Cada campanha devolve o que converteu, para quem e com qual mecanismo. Copia-se o prompt numa tarde; não se copia o histórico.</a:t>
+            </a:r>
+          </a:p>
+        </p:txBody>
+      </p:sp>
+      <p:sp>
+        <p:nvSpPr>
+          <p:cNvPr id="22" name="Rectangle 21"/>
+          <p:cNvSpPr/>
+          <p:nvPr/>
+        </p:nvSpPr>
+        <p:spPr>
+          <a:xfrm>
+            <a:off x="685800" y="6153912"/>
+            <a:ext cx="10820095" cy="10972"/>
+          </a:xfrm>
+          <a:prstGeom prst="rect">
+            <a:avLst/>
+          </a:prstGeom>
+          <a:solidFill>
+            <a:srgbClr val="2A2A28"/>
+          </a:solidFill>
+          <a:ln>
+            <a:noFill/>
+          </a:ln>
+          <a:effectLst/>
+        </p:spPr>
+        <p:style>
+          <a:lnRef idx="1">
+            <a:schemeClr val="accent1"/>
+          </a:lnRef>
+          <a:fillRef idx="3">
+            <a:schemeClr val="accent1"/>
+          </a:fillRef>
+          <a:effectRef idx="2">
+            <a:schemeClr val="accent1"/>
+          </a:effectRef>
+          <a:fontRef idx="minor">
+            <a:schemeClr val="lt1"/>
+          </a:fontRef>
+        </p:style>
+        <p:txBody>
+          <a:bodyPr rtlCol="0" anchor="ctr"/>
+          <a:lstStyle/>
+          <a:p>
+            <a:pPr algn="ctr"/>
+          </a:p>
+        </p:txBody>
+      </p:sp>
+    </p:spTree>
+  </p:cSld>
+  <p:clrMapOvr>
+    <a:masterClrMapping/>
+  </p:clrMapOvr>
+</p:sld>
+</file>
+
+<file path=ppt/slides/slide8.xml><?xml version="1.0" encoding="utf-8"?>
 <p:sld xmlns:a="http://schemas.openxmlformats.org/drawingml/2006/main" xmlns:p="http://schemas.openxmlformats.org/presentationml/2006/main" xmlns:r="http://schemas.openxmlformats.org/officeDocument/2006/relationships">
   <p:cSld>
     <p:spTree>

--- a/deck/BrandLoop-deck.pptx
+++ b/deck/BrandLoop-deck.pptx
@@ -4264,29 +4264,13 @@
               </a:lnSpc>
             </a:pPr>
             <a:r>
-              <a:rPr sz="2800" b="1">
+              <a:rPr sz="3200" b="1">
                 <a:solidFill>
                   <a:srgbClr val="F3EFE5"/>
                 </a:solidFill>
                 <a:latin typeface="Arial"/>
               </a:rPr>
-              <a:t>Não é um prompt.</a:t>
-            </a:r>
-          </a:p>
-          <a:p>
-            <a:pPr algn="l">
-              <a:lnSpc>
-                <a:spcPct val="105000"/>
-              </a:lnSpc>
-            </a:pPr>
-            <a:r>
-              <a:rPr sz="2800" b="1">
-                <a:solidFill>
-                  <a:srgbClr val="F3EFE5"/>
-                </a:solidFill>
-                <a:latin typeface="Arial"/>
-              </a:rPr>
-              <a:t>São seis agentes com contrato entre eles.</a:t>
+              <a:t>Uma agência inteira, em seis agentes.</a:t>
             </a:r>
           </a:p>
         </p:txBody>
@@ -4299,8 +4283,8 @@
         </p:nvSpPr>
         <p:spPr>
           <a:xfrm>
-            <a:off x="685800" y="2423160"/>
-            <a:ext cx="3520440" cy="1691640"/>
+            <a:off x="685800" y="2468880"/>
+            <a:ext cx="3520440" cy="1783080"/>
           </a:xfrm>
           <a:prstGeom prst="rect">
             <a:avLst/>
@@ -4343,7 +4327,7 @@
         </p:nvSpPr>
         <p:spPr>
           <a:xfrm>
-            <a:off x="886968" y="2587752"/>
+            <a:off x="886968" y="2615184"/>
             <a:ext cx="914400" cy="182880"/>
           </a:xfrm>
           <a:prstGeom prst="rect">
@@ -4378,8 +4362,8 @@
         </p:nvSpPr>
         <p:spPr>
           <a:xfrm>
-            <a:off x="886968" y="2807208"/>
-            <a:ext cx="3118104" cy="274320"/>
+            <a:off x="886968" y="2816352"/>
+            <a:ext cx="3118104" cy="256032"/>
           </a:xfrm>
           <a:prstGeom prst="rect">
             <a:avLst/>
@@ -4413,8 +4397,43 @@
         </p:nvSpPr>
         <p:spPr>
           <a:xfrm>
-            <a:off x="886968" y="3136391"/>
-            <a:ext cx="3118104" cy="640080"/>
+            <a:off x="886968" y="3090672"/>
+            <a:ext cx="3118104" cy="182880"/>
+          </a:xfrm>
+          <a:prstGeom prst="rect">
+            <a:avLst/>
+          </a:prstGeom>
+          <a:noFill/>
+        </p:spPr>
+        <p:txBody>
+          <a:bodyPr wrap="square" anchor="t" lIns="0" rIns="0" tIns="0" bIns="0">
+            <a:spAutoFit/>
+          </a:bodyPr>
+          <a:lstStyle/>
+          <a:p>
+            <a:pPr algn="l"/>
+            <a:r>
+              <a:rPr sz="750" b="0" spc="160">
+                <a:solidFill>
+                  <a:srgbClr val="8A8A86"/>
+                </a:solidFill>
+                <a:latin typeface="Courier New"/>
+              </a:rPr>
+              <a:t>ATENDIMENTO</a:t>
+            </a:r>
+          </a:p>
+        </p:txBody>
+      </p:sp>
+      <p:sp>
+        <p:nvSpPr>
+          <p:cNvPr id="9" name="TextBox 8"/>
+          <p:cNvSpPr txBox="1"/>
+          <p:nvPr/>
+        </p:nvSpPr>
+        <p:spPr>
+          <a:xfrm>
+            <a:off x="886968" y="3337560"/>
+            <a:ext cx="3118104" cy="594360"/>
           </a:xfrm>
           <a:prstGeom prst="rect">
             <a:avLst/>
@@ -4429,11 +4448,11 @@
           <a:p>
             <a:pPr algn="l">
               <a:lnSpc>
-                <a:spcPct val="125000"/>
+                <a:spcPct val="122000"/>
               </a:lnSpc>
             </a:pPr>
             <a:r>
-              <a:rPr sz="950" b="0">
+              <a:rPr sz="900" b="0">
                 <a:solidFill>
                   <a:srgbClr val="A8A49B"/>
                 </a:solidFill>
@@ -4446,13 +4465,13 @@
       </p:sp>
       <p:sp>
         <p:nvSpPr>
-          <p:cNvPr id="9" name="TextBox 8"/>
-          <p:cNvSpPr txBox="1"/>
-          <p:nvPr/>
-        </p:nvSpPr>
-        <p:spPr>
-          <a:xfrm>
-            <a:off x="886968" y="3803904"/>
+          <p:cNvPr id="10" name="TextBox 9"/>
+          <p:cNvSpPr txBox="1"/>
+          <p:nvPr/>
+        </p:nvSpPr>
+        <p:spPr>
+          <a:xfrm>
+            <a:off x="886968" y="3977640"/>
             <a:ext cx="3118104" cy="182880"/>
           </a:xfrm>
           <a:prstGeom prst="rect">
@@ -4481,14 +4500,14 @@
       </p:sp>
       <p:sp>
         <p:nvSpPr>
-          <p:cNvPr id="10" name="Rectangle 9"/>
+          <p:cNvPr id="11" name="Rectangle 10"/>
           <p:cNvSpPr/>
           <p:nvPr/>
         </p:nvSpPr>
         <p:spPr>
           <a:xfrm>
-            <a:off x="4407408" y="2423160"/>
-            <a:ext cx="3520440" cy="1691640"/>
+            <a:off x="4407408" y="2468880"/>
+            <a:ext cx="3520440" cy="1783080"/>
           </a:xfrm>
           <a:prstGeom prst="rect">
             <a:avLst/>
@@ -4525,13 +4544,13 @@
       </p:sp>
       <p:sp>
         <p:nvSpPr>
-          <p:cNvPr id="11" name="TextBox 10"/>
-          <p:cNvSpPr txBox="1"/>
-          <p:nvPr/>
-        </p:nvSpPr>
-        <p:spPr>
-          <a:xfrm>
-            <a:off x="4608576" y="2587752"/>
+          <p:cNvPr id="12" name="TextBox 11"/>
+          <p:cNvSpPr txBox="1"/>
+          <p:nvPr/>
+        </p:nvSpPr>
+        <p:spPr>
+          <a:xfrm>
+            <a:off x="4608576" y="2615184"/>
             <a:ext cx="914400" cy="182880"/>
           </a:xfrm>
           <a:prstGeom prst="rect">
@@ -4560,14 +4579,14 @@
       </p:sp>
       <p:sp>
         <p:nvSpPr>
-          <p:cNvPr id="12" name="TextBox 11"/>
-          <p:cNvSpPr txBox="1"/>
-          <p:nvPr/>
-        </p:nvSpPr>
-        <p:spPr>
-          <a:xfrm>
-            <a:off x="4608576" y="2807208"/>
-            <a:ext cx="3118104" cy="274320"/>
+          <p:cNvPr id="13" name="TextBox 12"/>
+          <p:cNvSpPr txBox="1"/>
+          <p:nvPr/>
+        </p:nvSpPr>
+        <p:spPr>
+          <a:xfrm>
+            <a:off x="4608576" y="2816352"/>
+            <a:ext cx="3118104" cy="256032"/>
           </a:xfrm>
           <a:prstGeom prst="rect">
             <a:avLst/>
@@ -4595,14 +4614,49 @@
       </p:sp>
       <p:sp>
         <p:nvSpPr>
-          <p:cNvPr id="13" name="TextBox 12"/>
-          <p:cNvSpPr txBox="1"/>
-          <p:nvPr/>
-        </p:nvSpPr>
-        <p:spPr>
-          <a:xfrm>
-            <a:off x="4608576" y="3136391"/>
-            <a:ext cx="3118104" cy="640080"/>
+          <p:cNvPr id="14" name="TextBox 13"/>
+          <p:cNvSpPr txBox="1"/>
+          <p:nvPr/>
+        </p:nvSpPr>
+        <p:spPr>
+          <a:xfrm>
+            <a:off x="4608576" y="3090672"/>
+            <a:ext cx="3118104" cy="182880"/>
+          </a:xfrm>
+          <a:prstGeom prst="rect">
+            <a:avLst/>
+          </a:prstGeom>
+          <a:noFill/>
+        </p:spPr>
+        <p:txBody>
+          <a:bodyPr wrap="square" anchor="t" lIns="0" rIns="0" tIns="0" bIns="0">
+            <a:spAutoFit/>
+          </a:bodyPr>
+          <a:lstStyle/>
+          <a:p>
+            <a:pPr algn="l"/>
+            <a:r>
+              <a:rPr sz="750" b="0" spc="160">
+                <a:solidFill>
+                  <a:srgbClr val="8A8A86"/>
+                </a:solidFill>
+                <a:latin typeface="Courier New"/>
+              </a:rPr>
+              <a:t>PLANEJAMENTO</a:t>
+            </a:r>
+          </a:p>
+        </p:txBody>
+      </p:sp>
+      <p:sp>
+        <p:nvSpPr>
+          <p:cNvPr id="15" name="TextBox 14"/>
+          <p:cNvSpPr txBox="1"/>
+          <p:nvPr/>
+        </p:nvSpPr>
+        <p:spPr>
+          <a:xfrm>
+            <a:off x="4608576" y="3337560"/>
+            <a:ext cx="3118104" cy="594360"/>
           </a:xfrm>
           <a:prstGeom prst="rect">
             <a:avLst/>
@@ -4617,11 +4671,11 @@
           <a:p>
             <a:pPr algn="l">
               <a:lnSpc>
-                <a:spcPct val="125000"/>
+                <a:spcPct val="122000"/>
               </a:lnSpc>
             </a:pPr>
             <a:r>
-              <a:rPr sz="950" b="0">
+              <a:rPr sz="900" b="0">
                 <a:solidFill>
                   <a:srgbClr val="A8A49B"/>
                 </a:solidFill>
@@ -4634,13 +4688,13 @@
       </p:sp>
       <p:sp>
         <p:nvSpPr>
-          <p:cNvPr id="14" name="TextBox 13"/>
-          <p:cNvSpPr txBox="1"/>
-          <p:nvPr/>
-        </p:nvSpPr>
-        <p:spPr>
-          <a:xfrm>
-            <a:off x="4608576" y="3803904"/>
+          <p:cNvPr id="16" name="TextBox 15"/>
+          <p:cNvSpPr txBox="1"/>
+          <p:nvPr/>
+        </p:nvSpPr>
+        <p:spPr>
+          <a:xfrm>
+            <a:off x="4608576" y="3977640"/>
             <a:ext cx="3118104" cy="182880"/>
           </a:xfrm>
           <a:prstGeom prst="rect">
@@ -4669,14 +4723,14 @@
       </p:sp>
       <p:sp>
         <p:nvSpPr>
-          <p:cNvPr id="15" name="Rectangle 14"/>
+          <p:cNvPr id="17" name="Rectangle 16"/>
           <p:cNvSpPr/>
           <p:nvPr/>
         </p:nvSpPr>
         <p:spPr>
           <a:xfrm>
-            <a:off x="8129016" y="2423160"/>
-            <a:ext cx="3520440" cy="1691640"/>
+            <a:off x="8129016" y="2468880"/>
+            <a:ext cx="3520440" cy="1783080"/>
           </a:xfrm>
           <a:prstGeom prst="rect">
             <a:avLst/>
@@ -4713,13 +4767,13 @@
       </p:sp>
       <p:sp>
         <p:nvSpPr>
-          <p:cNvPr id="16" name="TextBox 15"/>
-          <p:cNvSpPr txBox="1"/>
-          <p:nvPr/>
-        </p:nvSpPr>
-        <p:spPr>
-          <a:xfrm>
-            <a:off x="8330184" y="2587752"/>
+          <p:cNvPr id="18" name="TextBox 17"/>
+          <p:cNvSpPr txBox="1"/>
+          <p:nvPr/>
+        </p:nvSpPr>
+        <p:spPr>
+          <a:xfrm>
+            <a:off x="8330184" y="2615184"/>
             <a:ext cx="914400" cy="182880"/>
           </a:xfrm>
           <a:prstGeom prst="rect">
@@ -4748,14 +4802,14 @@
       </p:sp>
       <p:sp>
         <p:nvSpPr>
-          <p:cNvPr id="17" name="TextBox 16"/>
-          <p:cNvSpPr txBox="1"/>
-          <p:nvPr/>
-        </p:nvSpPr>
-        <p:spPr>
-          <a:xfrm>
-            <a:off x="8330184" y="2807208"/>
-            <a:ext cx="3118104" cy="274320"/>
+          <p:cNvPr id="19" name="TextBox 18"/>
+          <p:cNvSpPr txBox="1"/>
+          <p:nvPr/>
+        </p:nvSpPr>
+        <p:spPr>
+          <a:xfrm>
+            <a:off x="8330184" y="2816352"/>
+            <a:ext cx="3118104" cy="256032"/>
           </a:xfrm>
           <a:prstGeom prst="rect">
             <a:avLst/>
@@ -4783,14 +4837,49 @@
       </p:sp>
       <p:sp>
         <p:nvSpPr>
-          <p:cNvPr id="18" name="TextBox 17"/>
-          <p:cNvSpPr txBox="1"/>
-          <p:nvPr/>
-        </p:nvSpPr>
-        <p:spPr>
-          <a:xfrm>
-            <a:off x="8330184" y="3136391"/>
-            <a:ext cx="3118104" cy="640080"/>
+          <p:cNvPr id="20" name="TextBox 19"/>
+          <p:cNvSpPr txBox="1"/>
+          <p:nvPr/>
+        </p:nvSpPr>
+        <p:spPr>
+          <a:xfrm>
+            <a:off x="8330184" y="3090672"/>
+            <a:ext cx="3118104" cy="182880"/>
+          </a:xfrm>
+          <a:prstGeom prst="rect">
+            <a:avLst/>
+          </a:prstGeom>
+          <a:noFill/>
+        </p:spPr>
+        <p:txBody>
+          <a:bodyPr wrap="square" anchor="t" lIns="0" rIns="0" tIns="0" bIns="0">
+            <a:spAutoFit/>
+          </a:bodyPr>
+          <a:lstStyle/>
+          <a:p>
+            <a:pPr algn="l"/>
+            <a:r>
+              <a:rPr sz="750" b="0" spc="160">
+                <a:solidFill>
+                  <a:srgbClr val="8A8A86"/>
+                </a:solidFill>
+                <a:latin typeface="Courier New"/>
+              </a:rPr>
+              <a:t>PESQUISA</a:t>
+            </a:r>
+          </a:p>
+        </p:txBody>
+      </p:sp>
+      <p:sp>
+        <p:nvSpPr>
+          <p:cNvPr id="21" name="TextBox 20"/>
+          <p:cNvSpPr txBox="1"/>
+          <p:nvPr/>
+        </p:nvSpPr>
+        <p:spPr>
+          <a:xfrm>
+            <a:off x="8330184" y="3337560"/>
+            <a:ext cx="3118104" cy="594360"/>
           </a:xfrm>
           <a:prstGeom prst="rect">
             <a:avLst/>
@@ -4805,11 +4894,11 @@
           <a:p>
             <a:pPr algn="l">
               <a:lnSpc>
-                <a:spcPct val="125000"/>
+                <a:spcPct val="122000"/>
               </a:lnSpc>
             </a:pPr>
             <a:r>
-              <a:rPr sz="950" b="0">
+              <a:rPr sz="900" b="0">
                 <a:solidFill>
                   <a:srgbClr val="A8A49B"/>
                 </a:solidFill>
@@ -4822,13 +4911,13 @@
       </p:sp>
       <p:sp>
         <p:nvSpPr>
-          <p:cNvPr id="19" name="TextBox 18"/>
-          <p:cNvSpPr txBox="1"/>
-          <p:nvPr/>
-        </p:nvSpPr>
-        <p:spPr>
-          <a:xfrm>
-            <a:off x="8330184" y="3803904"/>
+          <p:cNvPr id="22" name="TextBox 21"/>
+          <p:cNvSpPr txBox="1"/>
+          <p:nvPr/>
+        </p:nvSpPr>
+        <p:spPr>
+          <a:xfrm>
+            <a:off x="8330184" y="3977640"/>
             <a:ext cx="3118104" cy="182880"/>
           </a:xfrm>
           <a:prstGeom prst="rect">
@@ -4857,14 +4946,14 @@
       </p:sp>
       <p:sp>
         <p:nvSpPr>
-          <p:cNvPr id="20" name="Rectangle 19"/>
+          <p:cNvPr id="23" name="Rectangle 22"/>
           <p:cNvSpPr/>
           <p:nvPr/>
         </p:nvSpPr>
         <p:spPr>
           <a:xfrm>
-            <a:off x="685800" y="4315968"/>
-            <a:ext cx="3520440" cy="1691640"/>
+            <a:off x="685800" y="4453128"/>
+            <a:ext cx="3520440" cy="1783080"/>
           </a:xfrm>
           <a:prstGeom prst="rect">
             <a:avLst/>
@@ -4901,13 +4990,13 @@
       </p:sp>
       <p:sp>
         <p:nvSpPr>
-          <p:cNvPr id="21" name="TextBox 20"/>
-          <p:cNvSpPr txBox="1"/>
-          <p:nvPr/>
-        </p:nvSpPr>
-        <p:spPr>
-          <a:xfrm>
-            <a:off x="886968" y="4480560"/>
+          <p:cNvPr id="24" name="TextBox 23"/>
+          <p:cNvSpPr txBox="1"/>
+          <p:nvPr/>
+        </p:nvSpPr>
+        <p:spPr>
+          <a:xfrm>
+            <a:off x="886968" y="4599432"/>
             <a:ext cx="914400" cy="182880"/>
           </a:xfrm>
           <a:prstGeom prst="rect">
@@ -4936,14 +5025,14 @@
       </p:sp>
       <p:sp>
         <p:nvSpPr>
-          <p:cNvPr id="22" name="TextBox 21"/>
-          <p:cNvSpPr txBox="1"/>
-          <p:nvPr/>
-        </p:nvSpPr>
-        <p:spPr>
-          <a:xfrm>
-            <a:off x="886968" y="4700016"/>
-            <a:ext cx="3118104" cy="274320"/>
+          <p:cNvPr id="25" name="TextBox 24"/>
+          <p:cNvSpPr txBox="1"/>
+          <p:nvPr/>
+        </p:nvSpPr>
+        <p:spPr>
+          <a:xfrm>
+            <a:off x="886968" y="4800600"/>
+            <a:ext cx="3118104" cy="256032"/>
           </a:xfrm>
           <a:prstGeom prst="rect">
             <a:avLst/>
@@ -4971,14 +5060,49 @@
       </p:sp>
       <p:sp>
         <p:nvSpPr>
-          <p:cNvPr id="23" name="TextBox 22"/>
-          <p:cNvSpPr txBox="1"/>
-          <p:nvPr/>
-        </p:nvSpPr>
-        <p:spPr>
-          <a:xfrm>
-            <a:off x="886968" y="5029200"/>
-            <a:ext cx="3118104" cy="640080"/>
+          <p:cNvPr id="26" name="TextBox 25"/>
+          <p:cNvSpPr txBox="1"/>
+          <p:nvPr/>
+        </p:nvSpPr>
+        <p:spPr>
+          <a:xfrm>
+            <a:off x="886968" y="5074920"/>
+            <a:ext cx="3118104" cy="182880"/>
+          </a:xfrm>
+          <a:prstGeom prst="rect">
+            <a:avLst/>
+          </a:prstGeom>
+          <a:noFill/>
+        </p:spPr>
+        <p:txBody>
+          <a:bodyPr wrap="square" anchor="t" lIns="0" rIns="0" tIns="0" bIns="0">
+            <a:spAutoFit/>
+          </a:bodyPr>
+          <a:lstStyle/>
+          <a:p>
+            <a:pPr algn="l"/>
+            <a:r>
+              <a:rPr sz="750" b="0" spc="160">
+                <a:solidFill>
+                  <a:srgbClr val="8A8A86"/>
+                </a:solidFill>
+                <a:latin typeface="Courier New"/>
+              </a:rPr>
+              <a:t>REDAÇÃO</a:t>
+            </a:r>
+          </a:p>
+        </p:txBody>
+      </p:sp>
+      <p:sp>
+        <p:nvSpPr>
+          <p:cNvPr id="27" name="TextBox 26"/>
+          <p:cNvSpPr txBox="1"/>
+          <p:nvPr/>
+        </p:nvSpPr>
+        <p:spPr>
+          <a:xfrm>
+            <a:off x="886968" y="5321808"/>
+            <a:ext cx="3118104" cy="594360"/>
           </a:xfrm>
           <a:prstGeom prst="rect">
             <a:avLst/>
@@ -4993,11 +5117,11 @@
           <a:p>
             <a:pPr algn="l">
               <a:lnSpc>
-                <a:spcPct val="125000"/>
+                <a:spcPct val="122000"/>
               </a:lnSpc>
             </a:pPr>
             <a:r>
-              <a:rPr sz="950" b="0">
+              <a:rPr sz="900" b="0">
                 <a:solidFill>
                   <a:srgbClr val="A8A49B"/>
                 </a:solidFill>
@@ -5010,13 +5134,13 @@
       </p:sp>
       <p:sp>
         <p:nvSpPr>
-          <p:cNvPr id="24" name="TextBox 23"/>
-          <p:cNvSpPr txBox="1"/>
-          <p:nvPr/>
-        </p:nvSpPr>
-        <p:spPr>
-          <a:xfrm>
-            <a:off x="886968" y="5696712"/>
+          <p:cNvPr id="28" name="TextBox 27"/>
+          <p:cNvSpPr txBox="1"/>
+          <p:nvPr/>
+        </p:nvSpPr>
+        <p:spPr>
+          <a:xfrm>
+            <a:off x="886968" y="5961888"/>
             <a:ext cx="3118104" cy="182880"/>
           </a:xfrm>
           <a:prstGeom prst="rect">
@@ -5045,14 +5169,14 @@
       </p:sp>
       <p:sp>
         <p:nvSpPr>
-          <p:cNvPr id="25" name="Rectangle 24"/>
+          <p:cNvPr id="29" name="Rectangle 28"/>
           <p:cNvSpPr/>
           <p:nvPr/>
         </p:nvSpPr>
         <p:spPr>
           <a:xfrm>
-            <a:off x="4407408" y="4315968"/>
-            <a:ext cx="3520440" cy="1691640"/>
+            <a:off x="4407408" y="4453128"/>
+            <a:ext cx="3520440" cy="1783080"/>
           </a:xfrm>
           <a:prstGeom prst="rect">
             <a:avLst/>
@@ -5089,13 +5213,13 @@
       </p:sp>
       <p:sp>
         <p:nvSpPr>
-          <p:cNvPr id="26" name="TextBox 25"/>
-          <p:cNvSpPr txBox="1"/>
-          <p:nvPr/>
-        </p:nvSpPr>
-        <p:spPr>
-          <a:xfrm>
-            <a:off x="4608576" y="4480560"/>
+          <p:cNvPr id="30" name="TextBox 29"/>
+          <p:cNvSpPr txBox="1"/>
+          <p:nvPr/>
+        </p:nvSpPr>
+        <p:spPr>
+          <a:xfrm>
+            <a:off x="4608576" y="4599432"/>
             <a:ext cx="914400" cy="182880"/>
           </a:xfrm>
           <a:prstGeom prst="rect">
@@ -5124,14 +5248,14 @@
       </p:sp>
       <p:sp>
         <p:nvSpPr>
-          <p:cNvPr id="27" name="TextBox 26"/>
-          <p:cNvSpPr txBox="1"/>
-          <p:nvPr/>
-        </p:nvSpPr>
-        <p:spPr>
-          <a:xfrm>
-            <a:off x="4608576" y="4700016"/>
-            <a:ext cx="3118104" cy="274320"/>
+          <p:cNvPr id="31" name="TextBox 30"/>
+          <p:cNvSpPr txBox="1"/>
+          <p:nvPr/>
+        </p:nvSpPr>
+        <p:spPr>
+          <a:xfrm>
+            <a:off x="4608576" y="4800600"/>
+            <a:ext cx="3118104" cy="256032"/>
           </a:xfrm>
           <a:prstGeom prst="rect">
             <a:avLst/>
@@ -5159,14 +5283,49 @@
       </p:sp>
       <p:sp>
         <p:nvSpPr>
-          <p:cNvPr id="28" name="TextBox 27"/>
-          <p:cNvSpPr txBox="1"/>
-          <p:nvPr/>
-        </p:nvSpPr>
-        <p:spPr>
-          <a:xfrm>
-            <a:off x="4608576" y="5029200"/>
-            <a:ext cx="3118104" cy="640080"/>
+          <p:cNvPr id="32" name="TextBox 31"/>
+          <p:cNvSpPr txBox="1"/>
+          <p:nvPr/>
+        </p:nvSpPr>
+        <p:spPr>
+          <a:xfrm>
+            <a:off x="4608576" y="5074920"/>
+            <a:ext cx="3118104" cy="182880"/>
+          </a:xfrm>
+          <a:prstGeom prst="rect">
+            <a:avLst/>
+          </a:prstGeom>
+          <a:noFill/>
+        </p:spPr>
+        <p:txBody>
+          <a:bodyPr wrap="square" anchor="t" lIns="0" rIns="0" tIns="0" bIns="0">
+            <a:spAutoFit/>
+          </a:bodyPr>
+          <a:lstStyle/>
+          <a:p>
+            <a:pPr algn="l"/>
+            <a:r>
+              <a:rPr sz="750" b="0" spc="160">
+                <a:solidFill>
+                  <a:srgbClr val="8A8A86"/>
+                </a:solidFill>
+                <a:latin typeface="Courier New"/>
+              </a:rPr>
+              <a:t>PRODUTORA</a:t>
+            </a:r>
+          </a:p>
+        </p:txBody>
+      </p:sp>
+      <p:sp>
+        <p:nvSpPr>
+          <p:cNvPr id="33" name="TextBox 32"/>
+          <p:cNvSpPr txBox="1"/>
+          <p:nvPr/>
+        </p:nvSpPr>
+        <p:spPr>
+          <a:xfrm>
+            <a:off x="4608576" y="5321808"/>
+            <a:ext cx="3118104" cy="594360"/>
           </a:xfrm>
           <a:prstGeom prst="rect">
             <a:avLst/>
@@ -5181,11 +5340,11 @@
           <a:p>
             <a:pPr algn="l">
               <a:lnSpc>
-                <a:spcPct val="125000"/>
+                <a:spcPct val="122000"/>
               </a:lnSpc>
             </a:pPr>
             <a:r>
-              <a:rPr sz="950" b="0">
+              <a:rPr sz="900" b="0">
                 <a:solidFill>
                   <a:srgbClr val="A8A49B"/>
                 </a:solidFill>
@@ -5198,13 +5357,13 @@
       </p:sp>
       <p:sp>
         <p:nvSpPr>
-          <p:cNvPr id="29" name="TextBox 28"/>
-          <p:cNvSpPr txBox="1"/>
-          <p:nvPr/>
-        </p:nvSpPr>
-        <p:spPr>
-          <a:xfrm>
-            <a:off x="4608576" y="5696712"/>
+          <p:cNvPr id="34" name="TextBox 33"/>
+          <p:cNvSpPr txBox="1"/>
+          <p:nvPr/>
+        </p:nvSpPr>
+        <p:spPr>
+          <a:xfrm>
+            <a:off x="4608576" y="5961888"/>
             <a:ext cx="3118104" cy="182880"/>
           </a:xfrm>
           <a:prstGeom prst="rect">
@@ -5233,14 +5392,14 @@
       </p:sp>
       <p:sp>
         <p:nvSpPr>
-          <p:cNvPr id="30" name="Rectangle 29"/>
+          <p:cNvPr id="35" name="Rectangle 34"/>
           <p:cNvSpPr/>
           <p:nvPr/>
         </p:nvSpPr>
         <p:spPr>
           <a:xfrm>
-            <a:off x="8129016" y="4315968"/>
-            <a:ext cx="3520440" cy="1691640"/>
+            <a:off x="8129016" y="4453128"/>
+            <a:ext cx="3520440" cy="1783080"/>
           </a:xfrm>
           <a:prstGeom prst="rect">
             <a:avLst/>
@@ -5277,13 +5436,13 @@
       </p:sp>
       <p:sp>
         <p:nvSpPr>
-          <p:cNvPr id="31" name="TextBox 30"/>
-          <p:cNvSpPr txBox="1"/>
-          <p:nvPr/>
-        </p:nvSpPr>
-        <p:spPr>
-          <a:xfrm>
-            <a:off x="8330184" y="4480560"/>
+          <p:cNvPr id="36" name="TextBox 35"/>
+          <p:cNvSpPr txBox="1"/>
+          <p:nvPr/>
+        </p:nvSpPr>
+        <p:spPr>
+          <a:xfrm>
+            <a:off x="8330184" y="4599432"/>
             <a:ext cx="914400" cy="182880"/>
           </a:xfrm>
           <a:prstGeom prst="rect">
@@ -5312,14 +5471,14 @@
       </p:sp>
       <p:sp>
         <p:nvSpPr>
-          <p:cNvPr id="32" name="TextBox 31"/>
-          <p:cNvSpPr txBox="1"/>
-          <p:nvPr/>
-        </p:nvSpPr>
-        <p:spPr>
-          <a:xfrm>
-            <a:off x="8330184" y="4700016"/>
-            <a:ext cx="3118104" cy="274320"/>
+          <p:cNvPr id="37" name="TextBox 36"/>
+          <p:cNvSpPr txBox="1"/>
+          <p:nvPr/>
+        </p:nvSpPr>
+        <p:spPr>
+          <a:xfrm>
+            <a:off x="8330184" y="4800600"/>
+            <a:ext cx="3118104" cy="256032"/>
           </a:xfrm>
           <a:prstGeom prst="rect">
             <a:avLst/>
@@ -5347,14 +5506,49 @@
       </p:sp>
       <p:sp>
         <p:nvSpPr>
-          <p:cNvPr id="33" name="TextBox 32"/>
-          <p:cNvSpPr txBox="1"/>
-          <p:nvPr/>
-        </p:nvSpPr>
-        <p:spPr>
-          <a:xfrm>
-            <a:off x="8330184" y="5029200"/>
-            <a:ext cx="3118104" cy="640080"/>
+          <p:cNvPr id="38" name="TextBox 37"/>
+          <p:cNvSpPr txBox="1"/>
+          <p:nvPr/>
+        </p:nvSpPr>
+        <p:spPr>
+          <a:xfrm>
+            <a:off x="8330184" y="5074920"/>
+            <a:ext cx="3118104" cy="182880"/>
+          </a:xfrm>
+          <a:prstGeom prst="rect">
+            <a:avLst/>
+          </a:prstGeom>
+          <a:noFill/>
+        </p:spPr>
+        <p:txBody>
+          <a:bodyPr wrap="square" anchor="t" lIns="0" rIns="0" tIns="0" bIns="0">
+            <a:spAutoFit/>
+          </a:bodyPr>
+          <a:lstStyle/>
+          <a:p>
+            <a:pPr algn="l"/>
+            <a:r>
+              <a:rPr sz="750" b="0" spc="160">
+                <a:solidFill>
+                  <a:srgbClr val="8A8A86"/>
+                </a:solidFill>
+                <a:latin typeface="Courier New"/>
+              </a:rPr>
+              <a:t>MÍDIA</a:t>
+            </a:r>
+          </a:p>
+        </p:txBody>
+      </p:sp>
+      <p:sp>
+        <p:nvSpPr>
+          <p:cNvPr id="39" name="TextBox 38"/>
+          <p:cNvSpPr txBox="1"/>
+          <p:nvPr/>
+        </p:nvSpPr>
+        <p:spPr>
+          <a:xfrm>
+            <a:off x="8330184" y="5321808"/>
+            <a:ext cx="3118104" cy="594360"/>
           </a:xfrm>
           <a:prstGeom prst="rect">
             <a:avLst/>
@@ -5369,11 +5563,11 @@
           <a:p>
             <a:pPr algn="l">
               <a:lnSpc>
-                <a:spcPct val="125000"/>
+                <a:spcPct val="122000"/>
               </a:lnSpc>
             </a:pPr>
             <a:r>
-              <a:rPr sz="950" b="0">
+              <a:rPr sz="900" b="0">
                 <a:solidFill>
                   <a:srgbClr val="A8A49B"/>
                 </a:solidFill>
@@ -5386,13 +5580,13 @@
       </p:sp>
       <p:sp>
         <p:nvSpPr>
-          <p:cNvPr id="34" name="TextBox 33"/>
-          <p:cNvSpPr txBox="1"/>
-          <p:nvPr/>
-        </p:nvSpPr>
-        <p:spPr>
-          <a:xfrm>
-            <a:off x="8330184" y="5696712"/>
+          <p:cNvPr id="40" name="TextBox 39"/>
+          <p:cNvSpPr txBox="1"/>
+          <p:nvPr/>
+        </p:nvSpPr>
+        <p:spPr>
+          <a:xfrm>
+            <a:off x="8330184" y="5961888"/>
             <a:ext cx="3118104" cy="182880"/>
           </a:xfrm>
           <a:prstGeom prst="rect">
@@ -5421,7 +5615,7 @@
       </p:sp>
       <p:sp>
         <p:nvSpPr>
-          <p:cNvPr id="35" name="TextBox 34"/>
+          <p:cNvPr id="41" name="TextBox 40"/>
           <p:cNvSpPr txBox="1"/>
           <p:nvPr/>
         </p:nvSpPr>
